--- a/presentations/16.1/School mapping in ESRI imagery.pptx
+++ b/presentations/16.1/School mapping in ESRI imagery.pptx
@@ -5,7 +5,7 @@
     <p:sldMasterId id="2147483684" r:id="rId1"/>
   </p:sldMasterIdLst>
   <p:notesMasterIdLst>
-    <p:notesMasterId r:id="rId20"/>
+    <p:notesMasterId r:id="rId17"/>
   </p:notesMasterIdLst>
   <p:sldIdLst>
     <p:sldId id="256" r:id="rId2"/>
@@ -19,13 +19,10 @@
     <p:sldId id="305" r:id="rId10"/>
     <p:sldId id="306" r:id="rId11"/>
     <p:sldId id="307" r:id="rId12"/>
-    <p:sldId id="310" r:id="rId13"/>
-    <p:sldId id="311" r:id="rId14"/>
-    <p:sldId id="308" r:id="rId15"/>
-    <p:sldId id="309" r:id="rId16"/>
-    <p:sldId id="312" r:id="rId17"/>
-    <p:sldId id="314" r:id="rId18"/>
-    <p:sldId id="315" r:id="rId19"/>
+    <p:sldId id="316" r:id="rId13"/>
+    <p:sldId id="317" r:id="rId14"/>
+    <p:sldId id="314" r:id="rId15"/>
+    <p:sldId id="315" r:id="rId16"/>
   </p:sldIdLst>
   <p:sldSz cx="12192000" cy="6858000"/>
   <p:notesSz cx="6858000" cy="9144000"/>
@@ -4628,7 +4625,11 @@
             <a:pPr lvl="1"/>
             <a:r>
               <a:rPr lang="en-US" sz="2400" dirty="0"/>
-              <a:t>Measure F1 score on predictions for variable thresholds (0-1)</a:t>
+              <a:t>Measure F1 score on predictions for </a:t>
+            </a:r>
+            <a:r>
+              <a:rPr lang="en-US" sz="2400" b="1" dirty="0"/>
+              <a:t>variable thresholds (0-1)</a:t>
             </a:r>
           </a:p>
           <a:p>
@@ -4639,7 +4640,11 @@
             <a:pPr lvl="1"/>
             <a:r>
               <a:rPr lang="en-US" sz="2400" dirty="0"/>
-              <a:t>Pick threshold with the highest F1 score</a:t>
+              <a:t>Pick threshold with the </a:t>
+            </a:r>
+            <a:r>
+              <a:rPr lang="en-US" sz="2400" b="1" dirty="0"/>
+              <a:t>highest F1 score</a:t>
             </a:r>
           </a:p>
           <a:p>
@@ -4650,9 +4655,13 @@
             <a:pPr lvl="1"/>
             <a:r>
               <a:rPr lang="en-US" sz="2400" dirty="0"/>
-              <a:t>Get recall, precision and F1 score for chosen threshold </a:t>
-            </a:r>
-            <a:endParaRPr lang="hr-HR" sz="2400" dirty="0"/>
+              <a:t>Get recall, precision and F1 score for chosen threshold on </a:t>
+            </a:r>
+            <a:r>
+              <a:rPr lang="en-US" sz="2400" b="1" dirty="0"/>
+              <a:t>exhaustive dataset</a:t>
+            </a:r>
+            <a:endParaRPr lang="hr-HR" sz="2400" b="1" dirty="0"/>
           </a:p>
         </p:txBody>
       </p:sp>
@@ -4706,7 +4715,7 @@
         <p:cNvPr id="1" name="">
           <a:extLst>
             <a:ext uri="{FF2B5EF4-FFF2-40B4-BE49-F238E27FC236}">
-              <a16:creationId xmlns:a16="http://schemas.microsoft.com/office/drawing/2014/main" id="{54C798B8-BA94-759B-3345-2600A45F5C1D}"/>
+              <a16:creationId xmlns:a16="http://schemas.microsoft.com/office/drawing/2014/main" id="{93626A37-C72A-63F8-A589-7D597A63234F}"/>
             </a:ext>
           </a:extLst>
         </p:cNvPr>
@@ -4726,7 +4735,7 @@
           <p:cNvPr id="2" name="Title 1">
             <a:extLst>
               <a:ext uri="{FF2B5EF4-FFF2-40B4-BE49-F238E27FC236}">
-                <a16:creationId xmlns:a16="http://schemas.microsoft.com/office/drawing/2014/main" id="{0F9D0AB5-581C-06C3-E240-B2F0933C565D}"/>
+                <a16:creationId xmlns:a16="http://schemas.microsoft.com/office/drawing/2014/main" id="{D808EFEA-2516-F75F-43D8-AE40072DFD6C}"/>
               </a:ext>
             </a:extLst>
           </p:cNvPr>
@@ -4744,7 +4753,7 @@
           <a:p>
             <a:r>
               <a:rPr lang="en-US" dirty="0"/>
-              <a:t>Threshold validation, 1:1 model</a:t>
+              <a:t>Threshold validation</a:t>
             </a:r>
             <a:endParaRPr lang="hr-HR" dirty="0"/>
           </a:p>
@@ -4755,7 +4764,7 @@
           <p:cNvPr id="3" name="Content Placeholder 2">
             <a:extLst>
               <a:ext uri="{FF2B5EF4-FFF2-40B4-BE49-F238E27FC236}">
-                <a16:creationId xmlns:a16="http://schemas.microsoft.com/office/drawing/2014/main" id="{E900D785-C868-5E87-B332-6565DDB9BCB4}"/>
+                <a16:creationId xmlns:a16="http://schemas.microsoft.com/office/drawing/2014/main" id="{15552ABF-0779-DCEA-DDAA-B3B17DE21090}"/>
               </a:ext>
             </a:extLst>
           </p:cNvPr>
@@ -4766,21 +4775,42 @@
             <p:ph idx="1"/>
           </p:nvPr>
         </p:nvSpPr>
-        <p:spPr/>
+        <p:spPr>
+          <a:xfrm>
+            <a:off x="1097280" y="1737360"/>
+            <a:ext cx="10058400" cy="4023360"/>
+          </a:xfrm>
+        </p:spPr>
         <p:txBody>
           <a:bodyPr>
-            <a:normAutofit/>
+            <a:noAutofit/>
           </a:bodyPr>
           <a:lstStyle/>
           <a:p>
             <a:pPr lvl="1"/>
             <a:r>
               <a:rPr lang="en-US" sz="2400" dirty="0"/>
-              <a:t>Fine-tuned for </a:t>
+              <a:t>Procedure is applied to multiple models with different fine-tune configurations (fine-tune on </a:t>
+            </a:r>
+            <a:r>
+              <a:rPr lang="en-US" sz="2400" b="1" dirty="0" err="1"/>
+              <a:t>Anditi</a:t>
             </a:r>
             <a:r>
               <a:rPr lang="en-US" sz="2400" b="1" dirty="0"/>
-              <a:t>20 epochs</a:t>
+              <a:t> dataset </a:t>
+            </a:r>
+            <a:r>
+              <a:rPr lang="en-US" sz="2400" dirty="0"/>
+              <a:t>with non-schools sampled from </a:t>
+            </a:r>
+            <a:r>
+              <a:rPr lang="en-US" sz="2400" b="1" dirty="0"/>
+              <a:t>OSM Vietnam</a:t>
+            </a:r>
+            <a:r>
+              <a:rPr lang="en-US" sz="2400" dirty="0"/>
+              <a:t>)</a:t>
             </a:r>
           </a:p>
           <a:p>
@@ -4790,32 +4820,60 @@
           <a:p>
             <a:pPr lvl="1"/>
             <a:r>
+              <a:rPr lang="en-US" sz="2400" dirty="0"/>
+              <a:t>Different number of </a:t>
+            </a:r>
+            <a:r>
+              <a:rPr lang="en-US" sz="2400" b="1" dirty="0"/>
+              <a:t>fine-tune epochs</a:t>
+            </a:r>
+            <a:r>
+              <a:rPr lang="en-US" sz="2400" dirty="0"/>
+              <a:t>:</a:t>
+            </a:r>
+          </a:p>
+          <a:p>
+            <a:pPr lvl="2"/>
+            <a:r>
+              <a:rPr lang="en-US" sz="2400" dirty="0"/>
+              <a:t>1 epoch</a:t>
+            </a:r>
+          </a:p>
+          <a:p>
+            <a:pPr lvl="2"/>
+            <a:r>
+              <a:rPr lang="en-US" sz="2400" dirty="0"/>
+              <a:t>20 epochs</a:t>
+            </a:r>
+          </a:p>
+          <a:p>
+            <a:pPr lvl="1"/>
+            <a:endParaRPr lang="en-US" sz="2400" dirty="0"/>
+          </a:p>
+          <a:p>
+            <a:pPr lvl="1"/>
+            <a:r>
               <a:rPr lang="en-US" sz="2400" b="1" dirty="0"/>
               <a:t>Dynamic Gaussian </a:t>
             </a:r>
             <a:r>
               <a:rPr lang="en-US" sz="2400" dirty="0"/>
-              <a:t>non-school sampling</a:t>
-            </a:r>
-          </a:p>
-          <a:p>
-            <a:pPr lvl="1"/>
-            <a:endParaRPr lang="en-US" sz="2400" dirty="0"/>
-          </a:p>
-          <a:p>
-            <a:pPr lvl="1"/>
+              <a:t>non-school sampling with different school : non-school sampling ratios:</a:t>
+            </a:r>
+          </a:p>
+          <a:p>
+            <a:pPr lvl="2"/>
             <a:r>
               <a:rPr lang="en-US" sz="2400" dirty="0"/>
-              <a:t>School : non-school ratio – </a:t>
-            </a:r>
-            <a:r>
-              <a:rPr lang="en-US" sz="2400" b="1" dirty="0"/>
-              <a:t>1 : 1</a:t>
-            </a:r>
-            <a:br>
+              <a:t>1:1</a:t>
+            </a:r>
+          </a:p>
+          <a:p>
+            <a:pPr lvl="2"/>
+            <a:r>
               <a:rPr lang="en-US" sz="2400" dirty="0"/>
-            </a:br>
-            <a:endParaRPr lang="en-US" sz="2400" b="1" dirty="0"/>
+              <a:t>1:10</a:t>
+            </a:r>
           </a:p>
         </p:txBody>
       </p:sp>
@@ -4824,7 +4882,7 @@
           <p:cNvPr id="4" name="Slide Number Placeholder 3">
             <a:extLst>
               <a:ext uri="{FF2B5EF4-FFF2-40B4-BE49-F238E27FC236}">
-                <a16:creationId xmlns:a16="http://schemas.microsoft.com/office/drawing/2014/main" id="{CACDB544-0D66-3A7D-454A-F18E173FD213}"/>
+                <a16:creationId xmlns:a16="http://schemas.microsoft.com/office/drawing/2014/main" id="{F735890E-8433-CECB-B45D-4EA4F3240772}"/>
               </a:ext>
             </a:extLst>
           </p:cNvPr>
@@ -4851,7 +4909,7 @@
     </p:spTree>
     <p:extLst>
       <p:ext uri="{BB962C8B-B14F-4D97-AF65-F5344CB8AC3E}">
-        <p14:creationId xmlns:p14="http://schemas.microsoft.com/office/powerpoint/2010/main" val="1180919629"/>
+        <p14:creationId xmlns:p14="http://schemas.microsoft.com/office/powerpoint/2010/main" val="3172995147"/>
       </p:ext>
     </p:extLst>
   </p:cSld>
@@ -4869,7 +4927,7 @@
         <p:cNvPr id="1" name="">
           <a:extLst>
             <a:ext uri="{FF2B5EF4-FFF2-40B4-BE49-F238E27FC236}">
-              <a16:creationId xmlns:a16="http://schemas.microsoft.com/office/drawing/2014/main" id="{73CCEA45-CB65-EC84-4B9F-EA45EEB66E98}"/>
+              <a16:creationId xmlns:a16="http://schemas.microsoft.com/office/drawing/2014/main" id="{97DED435-E7EF-A074-1792-F7E6200603C7}"/>
             </a:ext>
           </a:extLst>
         </p:cNvPr>
@@ -4884,51 +4942,15 @@
           <a:chExt cx="0" cy="0"/>
         </a:xfrm>
       </p:grpSpPr>
-      <p:pic>
-        <p:nvPicPr>
-          <p:cNvPr id="7" name="Picture 6" descr="A graph with a line drawn on it&#10;&#10;Description automatically generated">
+      <p:sp>
+        <p:nvSpPr>
+          <p:cNvPr id="2" name="Title 1">
             <a:extLst>
               <a:ext uri="{FF2B5EF4-FFF2-40B4-BE49-F238E27FC236}">
-                <a16:creationId xmlns:a16="http://schemas.microsoft.com/office/drawing/2014/main" id="{8F90D9BD-A5DD-83F1-8F7A-87A4B419E4A7}"/>
+                <a16:creationId xmlns:a16="http://schemas.microsoft.com/office/drawing/2014/main" id="{9235F402-0E7C-F258-F854-4891C701F6AF}"/>
               </a:ext>
             </a:extLst>
           </p:cNvPr>
-          <p:cNvPicPr>
-            <a:picLocks noChangeAspect="1"/>
-          </p:cNvPicPr>
-          <p:nvPr/>
-        </p:nvPicPr>
-        <p:blipFill>
-          <a:blip r:embed="rId2">
-            <a:extLst>
-              <a:ext uri="{28A0092B-C50C-407E-A947-70E740481C1C}">
-                <a14:useLocalDpi xmlns:a14="http://schemas.microsoft.com/office/drawing/2010/main" val="0"/>
-              </a:ext>
-            </a:extLst>
-          </a:blip>
-          <a:stretch>
-            <a:fillRect/>
-          </a:stretch>
-        </p:blipFill>
-        <p:spPr>
-          <a:xfrm>
-            <a:off x="6126480" y="1775310"/>
-            <a:ext cx="5852172" cy="4389129"/>
-          </a:xfrm>
-          <a:prstGeom prst="rect">
-            <a:avLst/>
-          </a:prstGeom>
-        </p:spPr>
-      </p:pic>
-      <p:sp>
-        <p:nvSpPr>
-          <p:cNvPr id="2" name="Title 1">
-            <a:extLst>
-              <a:ext uri="{FF2B5EF4-FFF2-40B4-BE49-F238E27FC236}">
-                <a16:creationId xmlns:a16="http://schemas.microsoft.com/office/drawing/2014/main" id="{AA1339B2-71D6-50E1-1736-31441FE4B113}"/>
-              </a:ext>
-            </a:extLst>
-          </p:cNvPr>
           <p:cNvSpPr>
             <a:spLocks noGrp="1"/>
           </p:cNvSpPr>
@@ -4943,7 +4965,7 @@
           <a:p>
             <a:r>
               <a:rPr lang="en-US" dirty="0"/>
-              <a:t>Threshold validation, 1:1 model</a:t>
+              <a:t>Threshold validation, results</a:t>
             </a:r>
             <a:endParaRPr lang="hr-HR" dirty="0"/>
           </a:p>
@@ -4954,7 +4976,7 @@
           <p:cNvPr id="4" name="Slide Number Placeholder 3">
             <a:extLst>
               <a:ext uri="{FF2B5EF4-FFF2-40B4-BE49-F238E27FC236}">
-                <a16:creationId xmlns:a16="http://schemas.microsoft.com/office/drawing/2014/main" id="{7CAAC539-6C0E-129A-E594-F58F69D811D1}"/>
+                <a16:creationId xmlns:a16="http://schemas.microsoft.com/office/drawing/2014/main" id="{327B9C44-E66C-25B2-06F1-00CF4969C72A}"/>
               </a:ext>
             </a:extLst>
           </p:cNvPr>
@@ -4978,133 +5000,497 @@
           </a:p>
         </p:txBody>
       </p:sp>
-      <p:sp>
-        <p:nvSpPr>
-          <p:cNvPr id="10" name="Content Placeholder 2">
+      <p:graphicFrame>
+        <p:nvGraphicFramePr>
+          <p:cNvPr id="5" name="Table 4">
             <a:extLst>
               <a:ext uri="{FF2B5EF4-FFF2-40B4-BE49-F238E27FC236}">
-                <a16:creationId xmlns:a16="http://schemas.microsoft.com/office/drawing/2014/main" id="{C7E90496-A38B-26BD-9D91-959038551D04}"/>
+                <a16:creationId xmlns:a16="http://schemas.microsoft.com/office/drawing/2014/main" id="{6AA471C1-E740-0DBB-1099-4BD83D1F7355}"/>
               </a:ext>
             </a:extLst>
           </p:cNvPr>
-          <p:cNvSpPr>
-            <a:spLocks noGrp="1"/>
-          </p:cNvSpPr>
-          <p:nvPr>
-            <p:ph idx="1"/>
-          </p:nvPr>
-        </p:nvSpPr>
-        <p:spPr>
-          <a:xfrm>
-            <a:off x="1097280" y="1845734"/>
-            <a:ext cx="10058400" cy="4023360"/>
-          </a:xfrm>
-        </p:spPr>
-        <p:txBody>
-          <a:bodyPr>
-            <a:normAutofit lnSpcReduction="10000"/>
-          </a:bodyPr>
-          <a:lstStyle/>
-          <a:p>
-            <a:pPr lvl="1"/>
-            <a:endParaRPr lang="en-US" sz="2400" b="0" i="0" dirty="0">
-              <a:solidFill>
-                <a:srgbClr val="242424"/>
-              </a:solidFill>
-              <a:effectLst/>
-              <a:latin typeface="Segoe UI" panose="020B0502040204020203" pitchFamily="34" charset="0"/>
-            </a:endParaRPr>
-          </a:p>
-          <a:p>
-            <a:pPr lvl="1"/>
-            <a:endParaRPr lang="en-US" sz="2400" dirty="0">
-              <a:solidFill>
-                <a:srgbClr val="242424"/>
-              </a:solidFill>
-              <a:latin typeface="Segoe UI" panose="020B0502040204020203" pitchFamily="34" charset="0"/>
-            </a:endParaRPr>
-          </a:p>
-          <a:p>
-            <a:pPr lvl="1"/>
-            <a:r>
-              <a:rPr lang="en-US" sz="2400" b="1" i="0" dirty="0">
-                <a:solidFill>
-                  <a:srgbClr val="242424"/>
-                </a:solidFill>
-                <a:effectLst/>
-              </a:rPr>
-              <a:t>Final threshold: 3.61%</a:t>
-            </a:r>
-          </a:p>
-          <a:p>
-            <a:pPr lvl="1"/>
-            <a:endParaRPr lang="en-US" sz="2400" b="0" i="0" dirty="0">
-              <a:solidFill>
-                <a:srgbClr val="242424"/>
-              </a:solidFill>
-              <a:effectLst/>
-            </a:endParaRPr>
-          </a:p>
-          <a:p>
-            <a:pPr lvl="1"/>
-            <a:r>
-              <a:rPr lang="en-US" sz="2400" b="0" i="0" dirty="0">
-                <a:solidFill>
-                  <a:srgbClr val="242424"/>
-                </a:solidFill>
-                <a:effectLst/>
-              </a:rPr>
-              <a:t>Final precision: 45.34%</a:t>
-            </a:r>
-            <a:br>
-              <a:rPr lang="en-US" sz="2400" dirty="0"/>
-            </a:br>
-            <a:endParaRPr lang="en-US" sz="2400" dirty="0"/>
-          </a:p>
-          <a:p>
-            <a:pPr lvl="1"/>
-            <a:r>
-              <a:rPr lang="en-US" sz="2400" b="0" i="0" dirty="0">
-                <a:solidFill>
-                  <a:srgbClr val="242424"/>
-                </a:solidFill>
-                <a:effectLst/>
-              </a:rPr>
-              <a:t>Final recall: 97.27%</a:t>
-            </a:r>
-            <a:br>
-              <a:rPr lang="en-US" sz="2400" dirty="0"/>
-            </a:br>
-            <a:endParaRPr lang="en-US" sz="2400" dirty="0"/>
-          </a:p>
-          <a:p>
-            <a:pPr lvl="1"/>
-            <a:r>
-              <a:rPr lang="en-US" sz="2400" b="1" i="0" dirty="0">
-                <a:solidFill>
-                  <a:srgbClr val="242424"/>
-                </a:solidFill>
-                <a:effectLst/>
-              </a:rPr>
-              <a:t>Final F1 score: 61.85%</a:t>
-            </a:r>
-            <a:endParaRPr lang="en-US" sz="2400" b="1" dirty="0"/>
-          </a:p>
-          <a:p>
-            <a:pPr marL="201168" lvl="1" indent="0">
-              <a:buNone/>
-            </a:pPr>
-            <a:br>
-              <a:rPr lang="en-US" sz="2400" dirty="0"/>
-            </a:br>
-            <a:endParaRPr lang="en-US" sz="2400" b="1" dirty="0"/>
-          </a:p>
-        </p:txBody>
-      </p:sp>
+          <p:cNvGraphicFramePr>
+            <a:graphicFrameLocks noGrp="1"/>
+          </p:cNvGraphicFramePr>
+          <p:nvPr>
+            <p:extLst>
+              <p:ext uri="{D42A27DB-BD31-4B8C-83A1-F6EECF244321}">
+                <p14:modId xmlns:p14="http://schemas.microsoft.com/office/powerpoint/2010/main" val="2328702315"/>
+              </p:ext>
+            </p:extLst>
+          </p:nvPr>
+        </p:nvGraphicFramePr>
+        <p:xfrm>
+          <a:off x="1023984" y="2201551"/>
+          <a:ext cx="10131696" cy="3768489"/>
+        </p:xfrm>
+        <a:graphic>
+          <a:graphicData uri="http://schemas.openxmlformats.org/drawingml/2006/table">
+            <a:tbl>
+              <a:tblPr firstRow="1" bandRow="1">
+                <a:tableStyleId>{5C22544A-7EE6-4342-B048-85BDC9FD1C3A}</a:tableStyleId>
+              </a:tblPr>
+              <a:tblGrid>
+                <a:gridCol w="1688616">
+                  <a:extLst>
+                    <a:ext uri="{9D8B030D-6E8A-4147-A177-3AD203B41FA5}">
+                      <a16:colId xmlns:a16="http://schemas.microsoft.com/office/drawing/2014/main" val="1991548073"/>
+                    </a:ext>
+                  </a:extLst>
+                </a:gridCol>
+                <a:gridCol w="1688616">
+                  <a:extLst>
+                    <a:ext uri="{9D8B030D-6E8A-4147-A177-3AD203B41FA5}">
+                      <a16:colId xmlns:a16="http://schemas.microsoft.com/office/drawing/2014/main" val="3575401396"/>
+                    </a:ext>
+                  </a:extLst>
+                </a:gridCol>
+                <a:gridCol w="1688616">
+                  <a:extLst>
+                    <a:ext uri="{9D8B030D-6E8A-4147-A177-3AD203B41FA5}">
+                      <a16:colId xmlns:a16="http://schemas.microsoft.com/office/drawing/2014/main" val="2013928293"/>
+                    </a:ext>
+                  </a:extLst>
+                </a:gridCol>
+                <a:gridCol w="1688616">
+                  <a:extLst>
+                    <a:ext uri="{9D8B030D-6E8A-4147-A177-3AD203B41FA5}">
+                      <a16:colId xmlns:a16="http://schemas.microsoft.com/office/drawing/2014/main" val="682525828"/>
+                    </a:ext>
+                  </a:extLst>
+                </a:gridCol>
+                <a:gridCol w="1688616">
+                  <a:extLst>
+                    <a:ext uri="{9D8B030D-6E8A-4147-A177-3AD203B41FA5}">
+                      <a16:colId xmlns:a16="http://schemas.microsoft.com/office/drawing/2014/main" val="2417135976"/>
+                    </a:ext>
+                  </a:extLst>
+                </a:gridCol>
+                <a:gridCol w="1688616">
+                  <a:extLst>
+                    <a:ext uri="{9D8B030D-6E8A-4147-A177-3AD203B41FA5}">
+                      <a16:colId xmlns:a16="http://schemas.microsoft.com/office/drawing/2014/main" val="1842548248"/>
+                    </a:ext>
+                  </a:extLst>
+                </a:gridCol>
+              </a:tblGrid>
+              <a:tr h="1001807">
+                <a:tc>
+                  <a:txBody>
+                    <a:bodyPr/>
+                    <a:lstStyle/>
+                    <a:p>
+                      <a:pPr algn="ctr"/>
+                      <a:r>
+                        <a:rPr lang="en-US" sz="2400" dirty="0"/>
+                        <a:t>School : non-school ratio</a:t>
+                      </a:r>
+                      <a:endParaRPr lang="hr-HR" sz="2400" dirty="0"/>
+                    </a:p>
+                  </a:txBody>
+                  <a:tcPr anchor="ctr"/>
+                </a:tc>
+                <a:tc>
+                  <a:txBody>
+                    <a:bodyPr/>
+                    <a:lstStyle/>
+                    <a:p>
+                      <a:pPr algn="ctr"/>
+                      <a:r>
+                        <a:rPr lang="en-US" sz="2400" dirty="0"/>
+                        <a:t>Fine-tune epochs</a:t>
+                      </a:r>
+                      <a:endParaRPr lang="hr-HR" sz="2400" dirty="0"/>
+                    </a:p>
+                  </a:txBody>
+                  <a:tcPr anchor="ctr"/>
+                </a:tc>
+                <a:tc>
+                  <a:txBody>
+                    <a:bodyPr/>
+                    <a:lstStyle/>
+                    <a:p>
+                      <a:pPr algn="ctr"/>
+                      <a:r>
+                        <a:rPr lang="en-US" sz="2400" dirty="0"/>
+                        <a:t>Best threshold (%)</a:t>
+                      </a:r>
+                      <a:endParaRPr lang="hr-HR" sz="2400" dirty="0"/>
+                    </a:p>
+                  </a:txBody>
+                  <a:tcPr anchor="ctr"/>
+                </a:tc>
+                <a:tc>
+                  <a:txBody>
+                    <a:bodyPr/>
+                    <a:lstStyle/>
+                    <a:p>
+                      <a:pPr algn="ctr"/>
+                      <a:r>
+                        <a:rPr lang="en-US" sz="2400" dirty="0"/>
+                        <a:t>Best </a:t>
+                      </a:r>
+                    </a:p>
+                    <a:p>
+                      <a:pPr algn="ctr"/>
+                      <a:r>
+                        <a:rPr lang="en-US" sz="2400" dirty="0"/>
+                        <a:t>F1 score (%)</a:t>
+                      </a:r>
+                      <a:endParaRPr lang="hr-HR" sz="2400" dirty="0"/>
+                    </a:p>
+                  </a:txBody>
+                  <a:tcPr anchor="ctr"/>
+                </a:tc>
+                <a:tc>
+                  <a:txBody>
+                    <a:bodyPr/>
+                    <a:lstStyle/>
+                    <a:p>
+                      <a:pPr algn="ctr"/>
+                      <a:r>
+                        <a:rPr lang="en-US" sz="2400" dirty="0"/>
+                        <a:t>Best </a:t>
+                      </a:r>
+                    </a:p>
+                    <a:p>
+                      <a:pPr algn="ctr"/>
+                      <a:r>
+                        <a:rPr lang="en-US" sz="2400" dirty="0"/>
+                        <a:t>Recall</a:t>
+                      </a:r>
+                    </a:p>
+                    <a:p>
+                      <a:pPr algn="ctr"/>
+                      <a:r>
+                        <a:rPr lang="en-US" sz="2400" dirty="0"/>
+                        <a:t>(%)</a:t>
+                      </a:r>
+                      <a:endParaRPr lang="hr-HR" sz="2400" dirty="0"/>
+                    </a:p>
+                  </a:txBody>
+                  <a:tcPr anchor="ctr"/>
+                </a:tc>
+                <a:tc>
+                  <a:txBody>
+                    <a:bodyPr/>
+                    <a:lstStyle/>
+                    <a:p>
+                      <a:pPr algn="ctr"/>
+                      <a:r>
+                        <a:rPr lang="en-US" sz="2400" dirty="0"/>
+                        <a:t>Best precision (%)</a:t>
+                      </a:r>
+                      <a:endParaRPr lang="hr-HR" sz="2400" dirty="0"/>
+                    </a:p>
+                  </a:txBody>
+                  <a:tcPr anchor="ctr"/>
+                </a:tc>
+                <a:extLst>
+                  <a:ext uri="{0D108BD9-81ED-4DB2-BD59-A6C34878D82A}">
+                    <a16:rowId xmlns:a16="http://schemas.microsoft.com/office/drawing/2014/main" val="2654719664"/>
+                  </a:ext>
+                </a:extLst>
+              </a:tr>
+              <a:tr h="859923">
+                <a:tc>
+                  <a:txBody>
+                    <a:bodyPr/>
+                    <a:lstStyle/>
+                    <a:p>
+                      <a:pPr algn="ctr"/>
+                      <a:r>
+                        <a:rPr lang="en-US" sz="2400" dirty="0"/>
+                        <a:t>1:1</a:t>
+                      </a:r>
+                      <a:endParaRPr lang="hr-HR" sz="2400" dirty="0"/>
+                    </a:p>
+                  </a:txBody>
+                  <a:tcPr anchor="ctr"/>
+                </a:tc>
+                <a:tc>
+                  <a:txBody>
+                    <a:bodyPr/>
+                    <a:lstStyle/>
+                    <a:p>
+                      <a:pPr algn="ctr"/>
+                      <a:r>
+                        <a:rPr lang="en-US" sz="2400" dirty="0"/>
+                        <a:t>20</a:t>
+                      </a:r>
+                      <a:endParaRPr lang="hr-HR" sz="2400" dirty="0"/>
+                    </a:p>
+                  </a:txBody>
+                  <a:tcPr anchor="ctr"/>
+                </a:tc>
+                <a:tc>
+                  <a:txBody>
+                    <a:bodyPr/>
+                    <a:lstStyle/>
+                    <a:p>
+                      <a:pPr algn="ctr"/>
+                      <a:r>
+                        <a:rPr lang="en-US" sz="2400" dirty="0"/>
+                        <a:t>3.61</a:t>
+                      </a:r>
+                      <a:endParaRPr lang="hr-HR" sz="2400" dirty="0"/>
+                    </a:p>
+                  </a:txBody>
+                  <a:tcPr anchor="ctr"/>
+                </a:tc>
+                <a:tc>
+                  <a:txBody>
+                    <a:bodyPr/>
+                    <a:lstStyle/>
+                    <a:p>
+                      <a:pPr algn="ctr"/>
+                      <a:r>
+                        <a:rPr lang="en-US" sz="2400" dirty="0"/>
+                        <a:t>61.85</a:t>
+                      </a:r>
+                      <a:endParaRPr lang="hr-HR" sz="2400" dirty="0"/>
+                    </a:p>
+                  </a:txBody>
+                  <a:tcPr anchor="ctr"/>
+                </a:tc>
+                <a:tc>
+                  <a:txBody>
+                    <a:bodyPr/>
+                    <a:lstStyle/>
+                    <a:p>
+                      <a:pPr algn="ctr"/>
+                      <a:r>
+                        <a:rPr lang="en-US" sz="2400" b="1" dirty="0"/>
+                        <a:t>97.27</a:t>
+                      </a:r>
+                      <a:endParaRPr lang="hr-HR" sz="2400" b="1" dirty="0"/>
+                    </a:p>
+                  </a:txBody>
+                  <a:tcPr anchor="ctr"/>
+                </a:tc>
+                <a:tc>
+                  <a:txBody>
+                    <a:bodyPr/>
+                    <a:lstStyle/>
+                    <a:p>
+                      <a:pPr algn="ctr"/>
+                      <a:r>
+                        <a:rPr lang="en-US" sz="2400" dirty="0"/>
+                        <a:t>45.34</a:t>
+                      </a:r>
+                      <a:endParaRPr lang="hr-HR" sz="2400" dirty="0"/>
+                    </a:p>
+                  </a:txBody>
+                  <a:tcPr anchor="ctr"/>
+                </a:tc>
+                <a:extLst>
+                  <a:ext uri="{0D108BD9-81ED-4DB2-BD59-A6C34878D82A}">
+                    <a16:rowId xmlns:a16="http://schemas.microsoft.com/office/drawing/2014/main" val="2085629051"/>
+                  </a:ext>
+                </a:extLst>
+              </a:tr>
+              <a:tr h="859923">
+                <a:tc>
+                  <a:txBody>
+                    <a:bodyPr/>
+                    <a:lstStyle/>
+                    <a:p>
+                      <a:pPr algn="ctr"/>
+                      <a:r>
+                        <a:rPr lang="en-US" sz="2400" dirty="0"/>
+                        <a:t>1:10</a:t>
+                      </a:r>
+                      <a:endParaRPr lang="hr-HR" sz="2400" dirty="0"/>
+                    </a:p>
+                  </a:txBody>
+                  <a:tcPr anchor="ctr"/>
+                </a:tc>
+                <a:tc>
+                  <a:txBody>
+                    <a:bodyPr/>
+                    <a:lstStyle/>
+                    <a:p>
+                      <a:pPr algn="ctr"/>
+                      <a:r>
+                        <a:rPr lang="en-US" sz="2400" dirty="0"/>
+                        <a:t>20</a:t>
+                      </a:r>
+                      <a:endParaRPr lang="hr-HR" sz="2400" dirty="0"/>
+                    </a:p>
+                  </a:txBody>
+                  <a:tcPr anchor="ctr"/>
+                </a:tc>
+                <a:tc>
+                  <a:txBody>
+                    <a:bodyPr/>
+                    <a:lstStyle/>
+                    <a:p>
+                      <a:pPr algn="ctr"/>
+                      <a:r>
+                        <a:rPr lang="en-US" sz="2400" dirty="0"/>
+                        <a:t>4.04</a:t>
+                      </a:r>
+                      <a:endParaRPr lang="hr-HR" sz="2400" dirty="0"/>
+                    </a:p>
+                  </a:txBody>
+                  <a:tcPr anchor="ctr"/>
+                </a:tc>
+                <a:tc>
+                  <a:txBody>
+                    <a:bodyPr/>
+                    <a:lstStyle/>
+                    <a:p>
+                      <a:pPr algn="ctr"/>
+                      <a:r>
+                        <a:rPr lang="en-US" sz="2400" dirty="0"/>
+                        <a:t>63.70</a:t>
+                      </a:r>
+                      <a:endParaRPr lang="hr-HR" sz="2400" dirty="0"/>
+                    </a:p>
+                  </a:txBody>
+                  <a:tcPr anchor="ctr"/>
+                </a:tc>
+                <a:tc>
+                  <a:txBody>
+                    <a:bodyPr/>
+                    <a:lstStyle/>
+                    <a:p>
+                      <a:pPr algn="ctr"/>
+                      <a:r>
+                        <a:rPr lang="en-US" sz="2400" dirty="0"/>
+                        <a:t>84.55</a:t>
+                      </a:r>
+                      <a:endParaRPr lang="hr-HR" sz="2400" dirty="0"/>
+                    </a:p>
+                  </a:txBody>
+                  <a:tcPr anchor="ctr"/>
+                </a:tc>
+                <a:tc>
+                  <a:txBody>
+                    <a:bodyPr/>
+                    <a:lstStyle/>
+                    <a:p>
+                      <a:pPr algn="ctr"/>
+                      <a:r>
+                        <a:rPr lang="en-US" sz="2400" dirty="0"/>
+                        <a:t>51.10</a:t>
+                      </a:r>
+                      <a:endParaRPr lang="hr-HR" sz="2400" dirty="0"/>
+                    </a:p>
+                  </a:txBody>
+                  <a:tcPr anchor="ctr"/>
+                </a:tc>
+                <a:extLst>
+                  <a:ext uri="{0D108BD9-81ED-4DB2-BD59-A6C34878D82A}">
+                    <a16:rowId xmlns:a16="http://schemas.microsoft.com/office/drawing/2014/main" val="724735351"/>
+                  </a:ext>
+                </a:extLst>
+              </a:tr>
+              <a:tr h="859923">
+                <a:tc>
+                  <a:txBody>
+                    <a:bodyPr/>
+                    <a:lstStyle/>
+                    <a:p>
+                      <a:pPr algn="ctr"/>
+                      <a:r>
+                        <a:rPr lang="en-US" sz="2400" dirty="0"/>
+                        <a:t>1:10</a:t>
+                      </a:r>
+                      <a:endParaRPr lang="hr-HR" sz="2400" dirty="0"/>
+                    </a:p>
+                  </a:txBody>
+                  <a:tcPr anchor="ctr"/>
+                </a:tc>
+                <a:tc>
+                  <a:txBody>
+                    <a:bodyPr/>
+                    <a:lstStyle/>
+                    <a:p>
+                      <a:pPr algn="ctr"/>
+                      <a:r>
+                        <a:rPr lang="en-US" sz="2400" dirty="0"/>
+                        <a:t>1</a:t>
+                      </a:r>
+                      <a:endParaRPr lang="hr-HR" sz="2400" dirty="0"/>
+                    </a:p>
+                  </a:txBody>
+                  <a:tcPr anchor="ctr"/>
+                </a:tc>
+                <a:tc>
+                  <a:txBody>
+                    <a:bodyPr/>
+                    <a:lstStyle/>
+                    <a:p>
+                      <a:pPr algn="ctr"/>
+                      <a:r>
+                        <a:rPr lang="en-US" sz="2400" dirty="0"/>
+                        <a:t>6.33</a:t>
+                      </a:r>
+                      <a:endParaRPr lang="hr-HR" sz="2400" dirty="0"/>
+                    </a:p>
+                  </a:txBody>
+                  <a:tcPr anchor="ctr"/>
+                </a:tc>
+                <a:tc>
+                  <a:txBody>
+                    <a:bodyPr/>
+                    <a:lstStyle/>
+                    <a:p>
+                      <a:pPr algn="ctr"/>
+                      <a:r>
+                        <a:rPr lang="en-US" sz="2400" b="1" dirty="0"/>
+                        <a:t>69.14</a:t>
+                      </a:r>
+                      <a:endParaRPr lang="hr-HR" sz="2400" b="1" dirty="0"/>
+                    </a:p>
+                  </a:txBody>
+                  <a:tcPr anchor="ctr"/>
+                </a:tc>
+                <a:tc>
+                  <a:txBody>
+                    <a:bodyPr/>
+                    <a:lstStyle/>
+                    <a:p>
+                      <a:pPr algn="ctr"/>
+                      <a:r>
+                        <a:rPr lang="en-US" sz="2400" dirty="0"/>
+                        <a:t>76.36</a:t>
+                      </a:r>
+                      <a:endParaRPr lang="hr-HR" sz="2400" dirty="0"/>
+                    </a:p>
+                  </a:txBody>
+                  <a:tcPr anchor="ctr"/>
+                </a:tc>
+                <a:tc>
+                  <a:txBody>
+                    <a:bodyPr/>
+                    <a:lstStyle/>
+                    <a:p>
+                      <a:pPr algn="ctr"/>
+                      <a:r>
+                        <a:rPr lang="en-US" sz="2400" b="1" dirty="0"/>
+                        <a:t>63.16</a:t>
+                      </a:r>
+                      <a:endParaRPr lang="hr-HR" sz="2400" b="1" dirty="0"/>
+                    </a:p>
+                  </a:txBody>
+                  <a:tcPr anchor="ctr"/>
+                </a:tc>
+                <a:extLst>
+                  <a:ext uri="{0D108BD9-81ED-4DB2-BD59-A6C34878D82A}">
+                    <a16:rowId xmlns:a16="http://schemas.microsoft.com/office/drawing/2014/main" val="741738474"/>
+                  </a:ext>
+                </a:extLst>
+              </a:tr>
+            </a:tbl>
+          </a:graphicData>
+        </a:graphic>
+      </p:graphicFrame>
     </p:spTree>
     <p:extLst>
       <p:ext uri="{BB962C8B-B14F-4D97-AF65-F5344CB8AC3E}">
-        <p14:creationId xmlns:p14="http://schemas.microsoft.com/office/powerpoint/2010/main" val="683070314"/>
+        <p14:creationId xmlns:p14="http://schemas.microsoft.com/office/powerpoint/2010/main" val="868353037"/>
       </p:ext>
     </p:extLst>
   </p:cSld>
@@ -5115,577 +5501,6 @@
 </file>
 
 <file path=ppt/slides/slide14.xml><?xml version="1.0" encoding="utf-8"?>
-<p:sld xmlns:a="http://schemas.openxmlformats.org/drawingml/2006/main" xmlns:r="http://schemas.openxmlformats.org/officeDocument/2006/relationships" xmlns:p="http://schemas.openxmlformats.org/presentationml/2006/main">
-  <p:cSld>
-    <p:spTree>
-      <p:nvGrpSpPr>
-        <p:cNvPr id="1" name="">
-          <a:extLst>
-            <a:ext uri="{FF2B5EF4-FFF2-40B4-BE49-F238E27FC236}">
-              <a16:creationId xmlns:a16="http://schemas.microsoft.com/office/drawing/2014/main" id="{77CF1F12-296B-A9F5-E32D-323877198AA3}"/>
-            </a:ext>
-          </a:extLst>
-        </p:cNvPr>
-        <p:cNvGrpSpPr/>
-        <p:nvPr/>
-      </p:nvGrpSpPr>
-      <p:grpSpPr>
-        <a:xfrm>
-          <a:off x="0" y="0"/>
-          <a:ext cx="0" cy="0"/>
-          <a:chOff x="0" y="0"/>
-          <a:chExt cx="0" cy="0"/>
-        </a:xfrm>
-      </p:grpSpPr>
-      <p:sp>
-        <p:nvSpPr>
-          <p:cNvPr id="2" name="Title 1">
-            <a:extLst>
-              <a:ext uri="{FF2B5EF4-FFF2-40B4-BE49-F238E27FC236}">
-                <a16:creationId xmlns:a16="http://schemas.microsoft.com/office/drawing/2014/main" id="{4DF889C4-C5C6-A02C-62E5-788D95584592}"/>
-              </a:ext>
-            </a:extLst>
-          </p:cNvPr>
-          <p:cNvSpPr>
-            <a:spLocks noGrp="1"/>
-          </p:cNvSpPr>
-          <p:nvPr>
-            <p:ph type="title"/>
-          </p:nvPr>
-        </p:nvSpPr>
-        <p:spPr/>
-        <p:txBody>
-          <a:bodyPr/>
-          <a:lstStyle/>
-          <a:p>
-            <a:r>
-              <a:rPr lang="en-US" dirty="0"/>
-              <a:t>Threshold validation, 1:10 model</a:t>
-            </a:r>
-            <a:endParaRPr lang="hr-HR" dirty="0"/>
-          </a:p>
-        </p:txBody>
-      </p:sp>
-      <p:sp>
-        <p:nvSpPr>
-          <p:cNvPr id="3" name="Content Placeholder 2">
-            <a:extLst>
-              <a:ext uri="{FF2B5EF4-FFF2-40B4-BE49-F238E27FC236}">
-                <a16:creationId xmlns:a16="http://schemas.microsoft.com/office/drawing/2014/main" id="{FBDFD6ED-CDD6-185E-285B-912642E97CD3}"/>
-              </a:ext>
-            </a:extLst>
-          </p:cNvPr>
-          <p:cNvSpPr>
-            <a:spLocks noGrp="1"/>
-          </p:cNvSpPr>
-          <p:nvPr>
-            <p:ph idx="1"/>
-          </p:nvPr>
-        </p:nvSpPr>
-        <p:spPr/>
-        <p:txBody>
-          <a:bodyPr>
-            <a:normAutofit/>
-          </a:bodyPr>
-          <a:lstStyle/>
-          <a:p>
-            <a:pPr lvl="1"/>
-            <a:r>
-              <a:rPr lang="en-US" sz="2400" dirty="0"/>
-              <a:t>Fine-tuned for </a:t>
-            </a:r>
-            <a:r>
-              <a:rPr lang="en-US" sz="2400" b="1" dirty="0"/>
-              <a:t>20 epochs</a:t>
-            </a:r>
-          </a:p>
-          <a:p>
-            <a:pPr lvl="1"/>
-            <a:endParaRPr lang="en-US" sz="2400" dirty="0"/>
-          </a:p>
-          <a:p>
-            <a:pPr lvl="1"/>
-            <a:r>
-              <a:rPr lang="en-US" sz="2400" b="1" dirty="0"/>
-              <a:t>Dynamic Gaussian </a:t>
-            </a:r>
-            <a:r>
-              <a:rPr lang="en-US" sz="2400" dirty="0"/>
-              <a:t>non-school sampling</a:t>
-            </a:r>
-          </a:p>
-          <a:p>
-            <a:pPr lvl="1"/>
-            <a:endParaRPr lang="en-US" sz="2400" dirty="0"/>
-          </a:p>
-          <a:p>
-            <a:pPr lvl="1"/>
-            <a:r>
-              <a:rPr lang="en-US" sz="2400" dirty="0"/>
-              <a:t>School : non-school ratio – </a:t>
-            </a:r>
-            <a:r>
-              <a:rPr lang="en-US" sz="2400" b="1" dirty="0"/>
-              <a:t>1 : 10</a:t>
-            </a:r>
-          </a:p>
-        </p:txBody>
-      </p:sp>
-      <p:sp>
-        <p:nvSpPr>
-          <p:cNvPr id="4" name="Slide Number Placeholder 3">
-            <a:extLst>
-              <a:ext uri="{FF2B5EF4-FFF2-40B4-BE49-F238E27FC236}">
-                <a16:creationId xmlns:a16="http://schemas.microsoft.com/office/drawing/2014/main" id="{9618A545-41DE-014E-0C9D-4562F631B396}"/>
-              </a:ext>
-            </a:extLst>
-          </p:cNvPr>
-          <p:cNvSpPr>
-            <a:spLocks noGrp="1"/>
-          </p:cNvSpPr>
-          <p:nvPr>
-            <p:ph type="sldNum" sz="quarter" idx="12"/>
-          </p:nvPr>
-        </p:nvSpPr>
-        <p:spPr/>
-        <p:txBody>
-          <a:bodyPr/>
-          <a:lstStyle/>
-          <a:p>
-            <a:fld id="{5434875C-B374-4DCB-B0EF-B862E54336C8}" type="slidenum">
-              <a:rPr lang="hr-HR" smtClean="0"/>
-              <a:t>14</a:t>
-            </a:fld>
-            <a:endParaRPr lang="hr-HR"/>
-          </a:p>
-        </p:txBody>
-      </p:sp>
-    </p:spTree>
-    <p:extLst>
-      <p:ext uri="{BB962C8B-B14F-4D97-AF65-F5344CB8AC3E}">
-        <p14:creationId xmlns:p14="http://schemas.microsoft.com/office/powerpoint/2010/main" val="1894637448"/>
-      </p:ext>
-    </p:extLst>
-  </p:cSld>
-  <p:clrMapOvr>
-    <a:masterClrMapping/>
-  </p:clrMapOvr>
-</p:sld>
-</file>
-
-<file path=ppt/slides/slide15.xml><?xml version="1.0" encoding="utf-8"?>
-<p:sld xmlns:a="http://schemas.openxmlformats.org/drawingml/2006/main" xmlns:r="http://schemas.openxmlformats.org/officeDocument/2006/relationships" xmlns:p="http://schemas.openxmlformats.org/presentationml/2006/main">
-  <p:cSld>
-    <p:spTree>
-      <p:nvGrpSpPr>
-        <p:cNvPr id="1" name="">
-          <a:extLst>
-            <a:ext uri="{FF2B5EF4-FFF2-40B4-BE49-F238E27FC236}">
-              <a16:creationId xmlns:a16="http://schemas.microsoft.com/office/drawing/2014/main" id="{008A84F5-20FD-5F0D-94C2-35B7C629579F}"/>
-            </a:ext>
-          </a:extLst>
-        </p:cNvPr>
-        <p:cNvGrpSpPr/>
-        <p:nvPr/>
-      </p:nvGrpSpPr>
-      <p:grpSpPr>
-        <a:xfrm>
-          <a:off x="0" y="0"/>
-          <a:ext cx="0" cy="0"/>
-          <a:chOff x="0" y="0"/>
-          <a:chExt cx="0" cy="0"/>
-        </a:xfrm>
-      </p:grpSpPr>
-      <p:sp>
-        <p:nvSpPr>
-          <p:cNvPr id="2" name="Title 1">
-            <a:extLst>
-              <a:ext uri="{FF2B5EF4-FFF2-40B4-BE49-F238E27FC236}">
-                <a16:creationId xmlns:a16="http://schemas.microsoft.com/office/drawing/2014/main" id="{6E4B0A52-96E0-754E-6552-D3D879328E92}"/>
-              </a:ext>
-            </a:extLst>
-          </p:cNvPr>
-          <p:cNvSpPr>
-            <a:spLocks noGrp="1"/>
-          </p:cNvSpPr>
-          <p:nvPr>
-            <p:ph type="title"/>
-          </p:nvPr>
-        </p:nvSpPr>
-        <p:spPr/>
-        <p:txBody>
-          <a:bodyPr/>
-          <a:lstStyle/>
-          <a:p>
-            <a:r>
-              <a:rPr lang="en-US" dirty="0"/>
-              <a:t>Threshold validation, 1:10 model</a:t>
-            </a:r>
-            <a:endParaRPr lang="hr-HR" dirty="0"/>
-          </a:p>
-        </p:txBody>
-      </p:sp>
-      <p:sp>
-        <p:nvSpPr>
-          <p:cNvPr id="3" name="Content Placeholder 2">
-            <a:extLst>
-              <a:ext uri="{FF2B5EF4-FFF2-40B4-BE49-F238E27FC236}">
-                <a16:creationId xmlns:a16="http://schemas.microsoft.com/office/drawing/2014/main" id="{0C8B0B10-1A35-02E6-746D-6FF0CCC05D4F}"/>
-              </a:ext>
-            </a:extLst>
-          </p:cNvPr>
-          <p:cNvSpPr>
-            <a:spLocks noGrp="1"/>
-          </p:cNvSpPr>
-          <p:nvPr>
-            <p:ph idx="1"/>
-          </p:nvPr>
-        </p:nvSpPr>
-        <p:spPr/>
-        <p:txBody>
-          <a:bodyPr>
-            <a:normAutofit lnSpcReduction="10000"/>
-          </a:bodyPr>
-          <a:lstStyle/>
-          <a:p>
-            <a:pPr lvl="1"/>
-            <a:endParaRPr lang="en-US" sz="2400" b="0" i="0" dirty="0">
-              <a:solidFill>
-                <a:srgbClr val="242424"/>
-              </a:solidFill>
-              <a:effectLst/>
-              <a:latin typeface="Segoe UI" panose="020B0502040204020203" pitchFamily="34" charset="0"/>
-            </a:endParaRPr>
-          </a:p>
-          <a:p>
-            <a:pPr lvl="1"/>
-            <a:endParaRPr lang="en-US" sz="2400" dirty="0">
-              <a:solidFill>
-                <a:srgbClr val="242424"/>
-              </a:solidFill>
-              <a:latin typeface="Segoe UI" panose="020B0502040204020203" pitchFamily="34" charset="0"/>
-            </a:endParaRPr>
-          </a:p>
-          <a:p>
-            <a:pPr lvl="1"/>
-            <a:r>
-              <a:rPr lang="en-US" sz="2400" b="1" i="0" dirty="0">
-                <a:solidFill>
-                  <a:srgbClr val="242424"/>
-                </a:solidFill>
-                <a:effectLst/>
-              </a:rPr>
-              <a:t>Final threshold: 4.04%</a:t>
-            </a:r>
-          </a:p>
-          <a:p>
-            <a:pPr lvl="1"/>
-            <a:endParaRPr lang="en-US" sz="2400" b="0" i="0" dirty="0">
-              <a:solidFill>
-                <a:srgbClr val="242424"/>
-              </a:solidFill>
-              <a:effectLst/>
-            </a:endParaRPr>
-          </a:p>
-          <a:p>
-            <a:pPr lvl="1"/>
-            <a:r>
-              <a:rPr lang="en-US" sz="2400" b="0" i="0" dirty="0">
-                <a:solidFill>
-                  <a:srgbClr val="242424"/>
-                </a:solidFill>
-                <a:effectLst/>
-              </a:rPr>
-              <a:t>Final precision: 51.10%</a:t>
-            </a:r>
-            <a:br>
-              <a:rPr lang="en-US" sz="2400" dirty="0"/>
-            </a:br>
-            <a:endParaRPr lang="en-US" sz="2400" dirty="0"/>
-          </a:p>
-          <a:p>
-            <a:pPr lvl="1"/>
-            <a:r>
-              <a:rPr lang="en-US" sz="2400" b="0" i="0" dirty="0">
-                <a:solidFill>
-                  <a:srgbClr val="242424"/>
-                </a:solidFill>
-                <a:effectLst/>
-              </a:rPr>
-              <a:t>Final recall: 84.55%</a:t>
-            </a:r>
-            <a:br>
-              <a:rPr lang="en-US" sz="2400" dirty="0"/>
-            </a:br>
-            <a:endParaRPr lang="en-US" sz="2400" dirty="0"/>
-          </a:p>
-          <a:p>
-            <a:pPr lvl="1"/>
-            <a:r>
-              <a:rPr lang="en-US" sz="2400" b="1" i="0" dirty="0">
-                <a:solidFill>
-                  <a:srgbClr val="242424"/>
-                </a:solidFill>
-                <a:effectLst/>
-              </a:rPr>
-              <a:t>Final F1 score: 63.70%</a:t>
-            </a:r>
-            <a:endParaRPr lang="en-US" sz="2400" b="1" dirty="0"/>
-          </a:p>
-          <a:p>
-            <a:pPr marL="201168" lvl="1" indent="0">
-              <a:buNone/>
-            </a:pPr>
-            <a:br>
-              <a:rPr lang="en-US" sz="2400" dirty="0"/>
-            </a:br>
-            <a:endParaRPr lang="en-US" sz="2400" b="1" dirty="0"/>
-          </a:p>
-        </p:txBody>
-      </p:sp>
-      <p:sp>
-        <p:nvSpPr>
-          <p:cNvPr id="4" name="Slide Number Placeholder 3">
-            <a:extLst>
-              <a:ext uri="{FF2B5EF4-FFF2-40B4-BE49-F238E27FC236}">
-                <a16:creationId xmlns:a16="http://schemas.microsoft.com/office/drawing/2014/main" id="{A84CEE77-5B89-6F71-CD41-A2B7CE73F916}"/>
-              </a:ext>
-            </a:extLst>
-          </p:cNvPr>
-          <p:cNvSpPr>
-            <a:spLocks noGrp="1"/>
-          </p:cNvSpPr>
-          <p:nvPr>
-            <p:ph type="sldNum" sz="quarter" idx="12"/>
-          </p:nvPr>
-        </p:nvSpPr>
-        <p:spPr/>
-        <p:txBody>
-          <a:bodyPr/>
-          <a:lstStyle/>
-          <a:p>
-            <a:fld id="{5434875C-B374-4DCB-B0EF-B862E54336C8}" type="slidenum">
-              <a:rPr lang="hr-HR" smtClean="0"/>
-              <a:t>15</a:t>
-            </a:fld>
-            <a:endParaRPr lang="hr-HR"/>
-          </a:p>
-        </p:txBody>
-      </p:sp>
-      <p:pic>
-        <p:nvPicPr>
-          <p:cNvPr id="6" name="Picture 5" descr="A graph with a line drawn on it&#10;&#10;Description automatically generated">
-            <a:extLst>
-              <a:ext uri="{FF2B5EF4-FFF2-40B4-BE49-F238E27FC236}">
-                <a16:creationId xmlns:a16="http://schemas.microsoft.com/office/drawing/2014/main" id="{62EE0E4A-3ABC-86FF-44AE-0C2B88DDD64F}"/>
-              </a:ext>
-            </a:extLst>
-          </p:cNvPr>
-          <p:cNvPicPr>
-            <a:picLocks noChangeAspect="1"/>
-          </p:cNvPicPr>
-          <p:nvPr/>
-        </p:nvPicPr>
-        <p:blipFill>
-          <a:blip r:embed="rId2">
-            <a:extLst>
-              <a:ext uri="{28A0092B-C50C-407E-A947-70E740481C1C}">
-                <a14:useLocalDpi xmlns:a14="http://schemas.microsoft.com/office/drawing/2010/main" val="0"/>
-              </a:ext>
-            </a:extLst>
-          </a:blip>
-          <a:stretch>
-            <a:fillRect/>
-          </a:stretch>
-        </p:blipFill>
-        <p:spPr>
-          <a:xfrm>
-            <a:off x="6096000" y="1775310"/>
-            <a:ext cx="5852172" cy="4389129"/>
-          </a:xfrm>
-          <a:prstGeom prst="rect">
-            <a:avLst/>
-          </a:prstGeom>
-        </p:spPr>
-      </p:pic>
-    </p:spTree>
-    <p:extLst>
-      <p:ext uri="{BB962C8B-B14F-4D97-AF65-F5344CB8AC3E}">
-        <p14:creationId xmlns:p14="http://schemas.microsoft.com/office/powerpoint/2010/main" val="2348504673"/>
-      </p:ext>
-    </p:extLst>
-  </p:cSld>
-  <p:clrMapOvr>
-    <a:masterClrMapping/>
-  </p:clrMapOvr>
-</p:sld>
-</file>
-
-<file path=ppt/slides/slide16.xml><?xml version="1.0" encoding="utf-8"?>
-<p:sld xmlns:a="http://schemas.openxmlformats.org/drawingml/2006/main" xmlns:r="http://schemas.openxmlformats.org/officeDocument/2006/relationships" xmlns:p="http://schemas.openxmlformats.org/presentationml/2006/main">
-  <p:cSld>
-    <p:spTree>
-      <p:nvGrpSpPr>
-        <p:cNvPr id="1" name="">
-          <a:extLst>
-            <a:ext uri="{FF2B5EF4-FFF2-40B4-BE49-F238E27FC236}">
-              <a16:creationId xmlns:a16="http://schemas.microsoft.com/office/drawing/2014/main" id="{F4DDCE65-18AE-6BD8-95BA-20A8CD10C0A6}"/>
-            </a:ext>
-          </a:extLst>
-        </p:cNvPr>
-        <p:cNvGrpSpPr/>
-        <p:nvPr/>
-      </p:nvGrpSpPr>
-      <p:grpSpPr>
-        <a:xfrm>
-          <a:off x="0" y="0"/>
-          <a:ext cx="0" cy="0"/>
-          <a:chOff x="0" y="0"/>
-          <a:chExt cx="0" cy="0"/>
-        </a:xfrm>
-      </p:grpSpPr>
-      <p:sp>
-        <p:nvSpPr>
-          <p:cNvPr id="2" name="Title 1">
-            <a:extLst>
-              <a:ext uri="{FF2B5EF4-FFF2-40B4-BE49-F238E27FC236}">
-                <a16:creationId xmlns:a16="http://schemas.microsoft.com/office/drawing/2014/main" id="{F9E5E320-887E-DB5B-53B3-D56E4D642988}"/>
-              </a:ext>
-            </a:extLst>
-          </p:cNvPr>
-          <p:cNvSpPr>
-            <a:spLocks noGrp="1"/>
-          </p:cNvSpPr>
-          <p:nvPr>
-            <p:ph type="title"/>
-          </p:nvPr>
-        </p:nvSpPr>
-        <p:spPr>
-          <a:xfrm>
-            <a:off x="1097280" y="286603"/>
-            <a:ext cx="10311938" cy="1450757"/>
-          </a:xfrm>
-        </p:spPr>
-        <p:txBody>
-          <a:bodyPr/>
-          <a:lstStyle/>
-          <a:p>
-            <a:r>
-              <a:rPr lang="en-US" dirty="0"/>
-              <a:t>Threshold validation, 1:10 model, 1 epoch</a:t>
-            </a:r>
-            <a:endParaRPr lang="hr-HR" dirty="0"/>
-          </a:p>
-        </p:txBody>
-      </p:sp>
-      <p:sp>
-        <p:nvSpPr>
-          <p:cNvPr id="3" name="Content Placeholder 2">
-            <a:extLst>
-              <a:ext uri="{FF2B5EF4-FFF2-40B4-BE49-F238E27FC236}">
-                <a16:creationId xmlns:a16="http://schemas.microsoft.com/office/drawing/2014/main" id="{52912CE6-F5AC-C992-8D5C-B3DC047AED98}"/>
-              </a:ext>
-            </a:extLst>
-          </p:cNvPr>
-          <p:cNvSpPr>
-            <a:spLocks noGrp="1"/>
-          </p:cNvSpPr>
-          <p:nvPr>
-            <p:ph idx="1"/>
-          </p:nvPr>
-        </p:nvSpPr>
-        <p:spPr/>
-        <p:txBody>
-          <a:bodyPr>
-            <a:normAutofit/>
-          </a:bodyPr>
-          <a:lstStyle/>
-          <a:p>
-            <a:pPr lvl="1"/>
-            <a:r>
-              <a:rPr lang="en-US" sz="2400" dirty="0"/>
-              <a:t>Fine-tuned for </a:t>
-            </a:r>
-            <a:r>
-              <a:rPr lang="en-US" sz="2400" b="1" dirty="0"/>
-              <a:t>1 epoch</a:t>
-            </a:r>
-          </a:p>
-          <a:p>
-            <a:pPr lvl="1"/>
-            <a:endParaRPr lang="en-US" sz="2400" dirty="0"/>
-          </a:p>
-          <a:p>
-            <a:pPr lvl="1"/>
-            <a:r>
-              <a:rPr lang="en-US" sz="2400" b="1" dirty="0"/>
-              <a:t>Dynamic Gaussian </a:t>
-            </a:r>
-            <a:r>
-              <a:rPr lang="en-US" sz="2400" dirty="0"/>
-              <a:t>non-school sampling</a:t>
-            </a:r>
-          </a:p>
-          <a:p>
-            <a:pPr lvl="1"/>
-            <a:endParaRPr lang="en-US" sz="2400" dirty="0"/>
-          </a:p>
-          <a:p>
-            <a:pPr lvl="1"/>
-            <a:r>
-              <a:rPr lang="en-US" sz="2400" dirty="0"/>
-              <a:t>School : non-school ratio – </a:t>
-            </a:r>
-            <a:r>
-              <a:rPr lang="en-US" sz="2400" b="1" dirty="0"/>
-              <a:t>1 : 10</a:t>
-            </a:r>
-          </a:p>
-        </p:txBody>
-      </p:sp>
-      <p:sp>
-        <p:nvSpPr>
-          <p:cNvPr id="4" name="Slide Number Placeholder 3">
-            <a:extLst>
-              <a:ext uri="{FF2B5EF4-FFF2-40B4-BE49-F238E27FC236}">
-                <a16:creationId xmlns:a16="http://schemas.microsoft.com/office/drawing/2014/main" id="{8D158095-05E7-18ED-A482-D2745337202A}"/>
-              </a:ext>
-            </a:extLst>
-          </p:cNvPr>
-          <p:cNvSpPr>
-            <a:spLocks noGrp="1"/>
-          </p:cNvSpPr>
-          <p:nvPr>
-            <p:ph type="sldNum" sz="quarter" idx="12"/>
-          </p:nvPr>
-        </p:nvSpPr>
-        <p:spPr/>
-        <p:txBody>
-          <a:bodyPr/>
-          <a:lstStyle/>
-          <a:p>
-            <a:fld id="{5434875C-B374-4DCB-B0EF-B862E54336C8}" type="slidenum">
-              <a:rPr lang="hr-HR" smtClean="0"/>
-              <a:t>16</a:t>
-            </a:fld>
-            <a:endParaRPr lang="hr-HR"/>
-          </a:p>
-        </p:txBody>
-      </p:sp>
-    </p:spTree>
-    <p:extLst>
-      <p:ext uri="{BB962C8B-B14F-4D97-AF65-F5344CB8AC3E}">
-        <p14:creationId xmlns:p14="http://schemas.microsoft.com/office/powerpoint/2010/main" val="2677588677"/>
-      </p:ext>
-    </p:extLst>
-  </p:cSld>
-  <p:clrMapOvr>
-    <a:masterClrMapping/>
-  </p:clrMapOvr>
-</p:sld>
-</file>
-
-<file path=ppt/slides/slide17.xml><?xml version="1.0" encoding="utf-8"?>
 <p:sld xmlns:a="http://schemas.openxmlformats.org/drawingml/2006/main" xmlns:r="http://schemas.openxmlformats.org/officeDocument/2006/relationships" xmlns:p="http://schemas.openxmlformats.org/presentationml/2006/main">
   <p:cSld>
     <p:spTree>
@@ -5736,8 +5551,8 @@
         </p:blipFill>
         <p:spPr>
           <a:xfrm>
-            <a:off x="6260175" y="1775309"/>
-            <a:ext cx="5852172" cy="4389129"/>
+            <a:off x="3103961" y="1854543"/>
+            <a:ext cx="5984077" cy="4488058"/>
           </a:xfrm>
           <a:prstGeom prst="rect">
             <a:avLst/>
@@ -5772,7 +5587,7 @@
           <a:p>
             <a:r>
               <a:rPr lang="en-US" dirty="0"/>
-              <a:t>Threshold validation, 1:10 model, 1 epoch</a:t>
+              <a:t>Threshold validation, 1:10 ratio, 1 epoch</a:t>
             </a:r>
             <a:endParaRPr lang="hr-HR" dirty="0"/>
           </a:p>
@@ -5801,132 +5616,9 @@
           <a:p>
             <a:fld id="{5434875C-B374-4DCB-B0EF-B862E54336C8}" type="slidenum">
               <a:rPr lang="hr-HR" smtClean="0"/>
-              <a:t>17</a:t>
+              <a:t>14</a:t>
             </a:fld>
             <a:endParaRPr lang="hr-HR"/>
-          </a:p>
-        </p:txBody>
-      </p:sp>
-      <p:sp>
-        <p:nvSpPr>
-          <p:cNvPr id="11" name="Content Placeholder 2">
-            <a:extLst>
-              <a:ext uri="{FF2B5EF4-FFF2-40B4-BE49-F238E27FC236}">
-                <a16:creationId xmlns:a16="http://schemas.microsoft.com/office/drawing/2014/main" id="{D03C6F23-A910-5C43-E6ED-B8AA1FEF88D5}"/>
-              </a:ext>
-            </a:extLst>
-          </p:cNvPr>
-          <p:cNvSpPr>
-            <a:spLocks noGrp="1"/>
-          </p:cNvSpPr>
-          <p:nvPr>
-            <p:ph idx="1"/>
-          </p:nvPr>
-        </p:nvSpPr>
-        <p:spPr>
-          <a:xfrm>
-            <a:off x="1097280" y="1845734"/>
-            <a:ext cx="10058400" cy="4023360"/>
-          </a:xfrm>
-        </p:spPr>
-        <p:txBody>
-          <a:bodyPr>
-            <a:normAutofit lnSpcReduction="10000"/>
-          </a:bodyPr>
-          <a:lstStyle/>
-          <a:p>
-            <a:pPr lvl="1"/>
-            <a:endParaRPr lang="en-US" sz="2400" b="0" i="0" dirty="0">
-              <a:solidFill>
-                <a:srgbClr val="242424"/>
-              </a:solidFill>
-              <a:effectLst/>
-              <a:latin typeface="Segoe UI" panose="020B0502040204020203" pitchFamily="34" charset="0"/>
-            </a:endParaRPr>
-          </a:p>
-          <a:p>
-            <a:pPr lvl="1"/>
-            <a:endParaRPr lang="en-US" sz="2400" dirty="0">
-              <a:solidFill>
-                <a:srgbClr val="242424"/>
-              </a:solidFill>
-              <a:latin typeface="Segoe UI" panose="020B0502040204020203" pitchFamily="34" charset="0"/>
-            </a:endParaRPr>
-          </a:p>
-          <a:p>
-            <a:pPr lvl="1"/>
-            <a:r>
-              <a:rPr lang="en-US" sz="2400" b="1" i="0" dirty="0">
-                <a:solidFill>
-                  <a:srgbClr val="242424"/>
-                </a:solidFill>
-                <a:effectLst/>
-              </a:rPr>
-              <a:t>Final threshold: 6.33%</a:t>
-            </a:r>
-          </a:p>
-          <a:p>
-            <a:pPr lvl="1"/>
-            <a:endParaRPr lang="en-US" sz="2400" b="0" i="0" dirty="0">
-              <a:solidFill>
-                <a:srgbClr val="242424"/>
-              </a:solidFill>
-              <a:effectLst/>
-            </a:endParaRPr>
-          </a:p>
-          <a:p>
-            <a:pPr lvl="1"/>
-            <a:r>
-              <a:rPr lang="en-US" sz="2400" b="0" i="0" dirty="0">
-                <a:solidFill>
-                  <a:srgbClr val="242424"/>
-                </a:solidFill>
-                <a:effectLst/>
-              </a:rPr>
-              <a:t>Final precision: 63.16%</a:t>
-            </a:r>
-            <a:br>
-              <a:rPr lang="en-US" sz="2400" dirty="0"/>
-            </a:br>
-            <a:endParaRPr lang="en-US" sz="2400" dirty="0"/>
-          </a:p>
-          <a:p>
-            <a:pPr lvl="1"/>
-            <a:r>
-              <a:rPr lang="en-US" sz="2400" b="0" i="0" dirty="0">
-                <a:solidFill>
-                  <a:srgbClr val="242424"/>
-                </a:solidFill>
-                <a:effectLst/>
-              </a:rPr>
-              <a:t>Final recall: 76.36%</a:t>
-            </a:r>
-            <a:br>
-              <a:rPr lang="en-US" sz="2400" dirty="0"/>
-            </a:br>
-            <a:endParaRPr lang="en-US" sz="2400" dirty="0"/>
-          </a:p>
-          <a:p>
-            <a:pPr lvl="1"/>
-            <a:r>
-              <a:rPr lang="en-US" sz="2400" b="1" i="0" dirty="0">
-                <a:solidFill>
-                  <a:srgbClr val="242424"/>
-                </a:solidFill>
-                <a:effectLst/>
-              </a:rPr>
-              <a:t>Final F1 score: 69.14%</a:t>
-            </a:r>
-            <a:endParaRPr lang="en-US" sz="2400" b="1" dirty="0"/>
-          </a:p>
-          <a:p>
-            <a:pPr marL="201168" lvl="1" indent="0">
-              <a:buNone/>
-            </a:pPr>
-            <a:br>
-              <a:rPr lang="en-US" sz="2400" dirty="0"/>
-            </a:br>
-            <a:endParaRPr lang="en-US" sz="2400" b="1" dirty="0"/>
           </a:p>
         </p:txBody>
       </p:sp>
@@ -5943,7 +5635,7 @@
 </p:sld>
 </file>
 
-<file path=ppt/slides/slide18.xml><?xml version="1.0" encoding="utf-8"?>
+<file path=ppt/slides/slide15.xml><?xml version="1.0" encoding="utf-8"?>
 <p:sld xmlns:a="http://schemas.openxmlformats.org/drawingml/2006/main" xmlns:r="http://schemas.openxmlformats.org/officeDocument/2006/relationships" xmlns:p="http://schemas.openxmlformats.org/presentationml/2006/main">
   <p:cSld>
     <p:spTree>
@@ -6026,7 +5718,37 @@
             <a:pPr lvl="1"/>
             <a:r>
               <a:rPr lang="en-US" sz="2400" dirty="0"/>
-              <a:t>Fine-tuning for 20 epochs may overfit the model to </a:t>
+              <a:t>F1 score for fine-tuned </a:t>
+            </a:r>
+            <a:r>
+              <a:rPr lang="en-US" sz="2400"/>
+              <a:t>model (1:10 ratio, 1 epoch):</a:t>
+            </a:r>
+            <a:endParaRPr lang="en-US" sz="2400" dirty="0"/>
+          </a:p>
+          <a:p>
+            <a:pPr lvl="2"/>
+            <a:r>
+              <a:rPr lang="en-US" sz="2400" dirty="0"/>
+              <a:t>Train: 88.38%</a:t>
+            </a:r>
+          </a:p>
+          <a:p>
+            <a:pPr lvl="2"/>
+            <a:r>
+              <a:rPr lang="en-US" sz="2400" b="1" dirty="0"/>
+              <a:t>Exhaustive: 69.14%</a:t>
+            </a:r>
+          </a:p>
+          <a:p>
+            <a:pPr lvl="1"/>
+            <a:endParaRPr lang="en-US" sz="2400" dirty="0"/>
+          </a:p>
+          <a:p>
+            <a:pPr lvl="1"/>
+            <a:r>
+              <a:rPr lang="en-US" sz="2400" dirty="0"/>
+              <a:t>Fine-tuning for 20 epochs may overfit the nation-wide model to </a:t>
             </a:r>
             <a:r>
               <a:rPr lang="en-US" sz="2400" dirty="0" err="1"/>
@@ -6045,27 +5767,14 @@
             <a:pPr lvl="1"/>
             <a:r>
               <a:rPr lang="en-US" sz="2400" dirty="0"/>
-              <a:t>Explore and test options for reducing the overfitting of our model</a:t>
-            </a:r>
-          </a:p>
-          <a:p>
-            <a:pPr lvl="1"/>
+              <a:t>Explore and test options for reducing overfitting</a:t>
+            </a:r>
+          </a:p>
+          <a:p>
+            <a:pPr marL="201168" lvl="1" indent="0">
+              <a:buNone/>
+            </a:pPr>
             <a:endParaRPr lang="en-US" sz="2400" dirty="0"/>
-          </a:p>
-          <a:p>
-            <a:pPr lvl="1"/>
-            <a:r>
-              <a:rPr lang="en-US" sz="2400" dirty="0"/>
-              <a:t>Validate newly fine-tuned model on exhaustive, narrow and </a:t>
-            </a:r>
-            <a:r>
-              <a:rPr lang="en-US" sz="2400" dirty="0" err="1"/>
-              <a:t>Anditi</a:t>
-            </a:r>
-            <a:r>
-              <a:rPr lang="en-US" sz="2400" dirty="0"/>
-              <a:t> dataset</a:t>
-            </a:r>
           </a:p>
         </p:txBody>
       </p:sp>
@@ -6092,7 +5801,7 @@
           <a:p>
             <a:fld id="{5434875C-B374-4DCB-B0EF-B862E54336C8}" type="slidenum">
               <a:rPr lang="hr-HR" smtClean="0"/>
-              <a:t>18</a:t>
+              <a:t>15</a:t>
             </a:fld>
             <a:endParaRPr lang="hr-HR"/>
           </a:p>
@@ -6519,7 +6228,7 @@
             </a:r>
             <a:r>
               <a:rPr lang="en-US" sz="2400" b="1" dirty="0"/>
-              <a:t> schools</a:t>
+              <a:t> schools (train data)</a:t>
             </a:r>
           </a:p>
           <a:p>
@@ -6668,7 +6377,12 @@
             <p:ph idx="1"/>
           </p:nvPr>
         </p:nvSpPr>
-        <p:spPr/>
+        <p:spPr>
+          <a:xfrm>
+            <a:off x="1097279" y="1845733"/>
+            <a:ext cx="10772503" cy="4441855"/>
+          </a:xfrm>
+        </p:spPr>
         <p:txBody>
           <a:bodyPr>
             <a:normAutofit/>
@@ -6677,6 +6391,30 @@
           <a:p>
             <a:pPr lvl="1"/>
             <a:r>
+              <a:rPr lang="hr-HR" sz="2400" dirty="0"/>
+              <a:t>Check performance on </a:t>
+            </a:r>
+            <a:r>
+              <a:rPr lang="hr-HR" sz="2400" b="1" dirty="0"/>
+              <a:t>train data (Anditi schools) </a:t>
+            </a:r>
+            <a:r>
+              <a:rPr lang="hr-HR" sz="2400" dirty="0"/>
+              <a:t>–</a:t>
+            </a:r>
+            <a:r>
+              <a:rPr lang="en-US" sz="2400" dirty="0"/>
+              <a:t> sanity check before evaluation</a:t>
+            </a:r>
+            <a:endParaRPr lang="hr-HR" sz="2400" dirty="0"/>
+          </a:p>
+          <a:p>
+            <a:pPr lvl="1"/>
+            <a:endParaRPr lang="hr-HR" sz="2400" dirty="0"/>
+          </a:p>
+          <a:p>
+            <a:pPr lvl="1"/>
+            <a:r>
               <a:rPr lang="en-US" sz="2400" dirty="0"/>
               <a:t>Found 900/946 (</a:t>
             </a:r>
@@ -6709,21 +6447,7 @@
             <a:pPr lvl="1"/>
             <a:r>
               <a:rPr lang="en-US" sz="2400" dirty="0"/>
-              <a:t>Recall (min probs): 95.14%</a:t>
-            </a:r>
-          </a:p>
-          <a:p>
-            <a:pPr lvl="1"/>
-            <a:r>
-              <a:rPr lang="en-US" sz="2400" dirty="0"/>
-              <a:t>Recall (mean probs): 95.14%</a:t>
-            </a:r>
-          </a:p>
-          <a:p>
-            <a:pPr lvl="1"/>
-            <a:r>
-              <a:rPr lang="en-US" sz="2400" dirty="0"/>
-              <a:t>Recall (max probs): 95.14%</a:t>
+              <a:t>Recall: 95.14%</a:t>
             </a:r>
           </a:p>
           <a:p>
@@ -6894,7 +6618,7 @@
             <a:pPr lvl="1"/>
             <a:r>
               <a:rPr lang="en-US" sz="2400" dirty="0"/>
-              <a:t>Only measured recall, not precision and </a:t>
+              <a:t>Only measured train recall, not precision and </a:t>
             </a:r>
             <a:r>
               <a:rPr lang="en-US" sz="2400" b="1" dirty="0"/>
@@ -7111,7 +6835,31 @@
             <a:pPr lvl="1"/>
             <a:r>
               <a:rPr lang="en-US" sz="2400" dirty="0"/>
-              <a:t>Two hand-collected datasets</a:t>
+              <a:t>We have hand-collected two subsets of school locations:</a:t>
+            </a:r>
+          </a:p>
+          <a:p>
+            <a:pPr lvl="1"/>
+            <a:endParaRPr lang="en-US" sz="2400" dirty="0"/>
+          </a:p>
+          <a:p>
+            <a:pPr lvl="2"/>
+            <a:r>
+              <a:rPr lang="en-US" sz="2400" dirty="0"/>
+              <a:t>Exhaustive dataset</a:t>
+            </a:r>
+          </a:p>
+          <a:p>
+            <a:pPr marL="384048" lvl="2" indent="0">
+              <a:buNone/>
+            </a:pPr>
+            <a:endParaRPr lang="en-US" sz="2400" dirty="0"/>
+          </a:p>
+          <a:p>
+            <a:pPr lvl="2"/>
+            <a:r>
+              <a:rPr lang="en-US" sz="2400" dirty="0"/>
+              <a:t>Wide dataset</a:t>
             </a:r>
           </a:p>
           <a:p>

--- a/presentations/16.1/School mapping in ESRI imagery.pptx
+++ b/presentations/16.1/School mapping in ESRI imagery.pptx
@@ -4429,7 +4429,7 @@
         <p:spPr/>
         <p:txBody>
           <a:bodyPr>
-            <a:normAutofit/>
+            <a:normAutofit lnSpcReduction="10000"/>
           </a:bodyPr>
           <a:lstStyle/>
           <a:p>
@@ -4438,6 +4438,83 @@
               <a:rPr lang="en-US" sz="2400" dirty="0"/>
               <a:t>Locations from 5 districts</a:t>
             </a:r>
+            <a:r>
+              <a:rPr lang="hr-HR" sz="2400" dirty="0"/>
+              <a:t>:</a:t>
+            </a:r>
+          </a:p>
+          <a:p>
+            <a:pPr lvl="2"/>
+            <a:r>
+              <a:rPr lang="en-US" sz="2400" dirty="0"/>
+              <a:t>Lê </a:t>
+            </a:r>
+            <a:r>
+              <a:rPr lang="en-US" sz="2400" dirty="0" err="1"/>
+              <a:t>Chân</a:t>
+            </a:r>
+            <a:r>
+              <a:rPr lang="en-US" sz="2400" dirty="0"/>
+              <a:t> District</a:t>
+            </a:r>
+          </a:p>
+          <a:p>
+            <a:pPr lvl="2"/>
+            <a:r>
+              <a:rPr lang="en-US" sz="2400" dirty="0"/>
+              <a:t>Hoài </a:t>
+            </a:r>
+            <a:r>
+              <a:rPr lang="en-US" sz="2400" dirty="0" err="1"/>
+              <a:t>Đức</a:t>
+            </a:r>
+            <a:r>
+              <a:rPr lang="en-US" sz="2400" dirty="0"/>
+              <a:t> District</a:t>
+            </a:r>
+          </a:p>
+          <a:p>
+            <a:pPr lvl="2"/>
+            <a:r>
+              <a:rPr lang="en-US" sz="2400" dirty="0" err="1"/>
+              <a:t>Cà</a:t>
+            </a:r>
+            <a:r>
+              <a:rPr lang="en-US" sz="2400" dirty="0"/>
+              <a:t> Mau</a:t>
+            </a:r>
+          </a:p>
+          <a:p>
+            <a:pPr lvl="2"/>
+            <a:r>
+              <a:rPr lang="en-US" sz="2400" dirty="0" err="1"/>
+              <a:t>Bà</a:t>
+            </a:r>
+            <a:r>
+              <a:rPr lang="en-US" sz="2400" dirty="0"/>
+              <a:t> </a:t>
+            </a:r>
+            <a:r>
+              <a:rPr lang="en-US" sz="2400" dirty="0" err="1"/>
+              <a:t>Rịa</a:t>
+            </a:r>
+            <a:endParaRPr lang="en-US" sz="2400" dirty="0"/>
+          </a:p>
+          <a:p>
+            <a:pPr lvl="2"/>
+            <a:r>
+              <a:rPr lang="en-US" sz="2400" dirty="0" err="1"/>
+              <a:t>Sóc</a:t>
+            </a:r>
+            <a:r>
+              <a:rPr lang="en-US" sz="2400" dirty="0"/>
+              <a:t> </a:t>
+            </a:r>
+            <a:r>
+              <a:rPr lang="en-US" sz="2400" dirty="0" err="1"/>
+              <a:t>Trăng</a:t>
+            </a:r>
+            <a:endParaRPr lang="en-US" sz="2400" dirty="0"/>
           </a:p>
           <a:p>
             <a:pPr lvl="1"/>
@@ -4453,20 +4530,17 @@
               <a:rPr lang="en-US" sz="2400" dirty="0"/>
               <a:t>(not exhaustive search!)</a:t>
             </a:r>
-          </a:p>
-          <a:p>
-            <a:pPr lvl="1"/>
-            <a:endParaRPr lang="en-US" sz="2400" dirty="0"/>
-          </a:p>
-          <a:p>
-            <a:pPr lvl="1"/>
+            <a:r>
+              <a:rPr lang="hr-HR" sz="2400" dirty="0"/>
+              <a:t>, </a:t>
+            </a:r>
             <a:r>
               <a:rPr lang="en-US" sz="2400" b="1" dirty="0"/>
-              <a:t>20 981 overlapping tiles</a:t>
+              <a:t>20 981 overlapping tiles total </a:t>
             </a:r>
             <a:r>
               <a:rPr lang="en-US" sz="2400" dirty="0"/>
-              <a:t> total (after filtering)</a:t>
+              <a:t>(after filtering)</a:t>
             </a:r>
           </a:p>
           <a:p>
@@ -6989,15 +7063,60 @@
         <p:spPr/>
         <p:txBody>
           <a:bodyPr>
-            <a:normAutofit/>
+            <a:noAutofit/>
           </a:bodyPr>
           <a:lstStyle/>
           <a:p>
             <a:pPr lvl="1"/>
             <a:r>
               <a:rPr lang="en-US" sz="2400" dirty="0"/>
-              <a:t>Locations from 4 wards</a:t>
-            </a:r>
+              <a:t>Locations from 4 </a:t>
+            </a:r>
+            <a:r>
+              <a:rPr lang="hr-HR" sz="2400" dirty="0"/>
+              <a:t>subdistricts (wards) from </a:t>
+            </a:r>
+            <a:r>
+              <a:rPr lang="it-IT" sz="2400" b="1" dirty="0"/>
+              <a:t>Thủ Đức</a:t>
+            </a:r>
+            <a:r>
+              <a:rPr lang="hr-HR" sz="2400" b="1" dirty="0"/>
+              <a:t> District</a:t>
+            </a:r>
+            <a:r>
+              <a:rPr lang="hr-HR" sz="2400" dirty="0"/>
+              <a:t>:  </a:t>
+            </a:r>
+          </a:p>
+          <a:p>
+            <a:pPr lvl="2"/>
+            <a:r>
+              <a:rPr lang="hr-HR" sz="2400" dirty="0"/>
+              <a:t>Linh Xuan Ward</a:t>
+            </a:r>
+          </a:p>
+          <a:p>
+            <a:pPr lvl="2"/>
+            <a:r>
+              <a:rPr lang="hr-HR" sz="2400" dirty="0"/>
+              <a:t>Binh Chieu Ward</a:t>
+            </a:r>
+          </a:p>
+          <a:p>
+            <a:pPr lvl="2"/>
+            <a:r>
+              <a:rPr lang="hr-HR" sz="2400" dirty="0"/>
+              <a:t>Tam Binh Ward</a:t>
+            </a:r>
+          </a:p>
+          <a:p>
+            <a:pPr lvl="2"/>
+            <a:r>
+              <a:rPr lang="hr-HR" sz="2400" dirty="0"/>
+              <a:t>Hiep Binh Phuoc Ward</a:t>
+            </a:r>
+            <a:endParaRPr lang="en-US" sz="2400" dirty="0"/>
           </a:p>
           <a:p>
             <a:pPr lvl="1"/>
@@ -7013,20 +7132,17 @@
               <a:rPr lang="en-US" sz="2400" dirty="0"/>
               <a:t>(exhaustive search)</a:t>
             </a:r>
-          </a:p>
-          <a:p>
-            <a:pPr lvl="1"/>
-            <a:endParaRPr lang="en-US" sz="2400" dirty="0"/>
-          </a:p>
-          <a:p>
-            <a:pPr lvl="1"/>
+            <a:r>
+              <a:rPr lang="hr-HR" sz="2400" dirty="0"/>
+              <a:t>, </a:t>
+            </a:r>
             <a:r>
               <a:rPr lang="en-US" sz="2400" b="1" dirty="0"/>
-              <a:t>1163 overlapping tiles </a:t>
+              <a:t>1163 overlapping tiles total </a:t>
             </a:r>
             <a:r>
               <a:rPr lang="en-US" sz="2400" dirty="0"/>
-              <a:t>total (after filtering)</a:t>
+              <a:t>(after filtering)</a:t>
             </a:r>
           </a:p>
           <a:p>

--- a/presentations/16.1/School mapping in ESRI imagery.pptx
+++ b/presentations/16.1/School mapping in ESRI imagery.pptx
@@ -211,7 +211,7 @@
           <a:p>
             <a:fld id="{530B7F9E-A1C3-49A9-9E10-41E48F42B6EF}" type="datetimeFigureOut">
               <a:rPr lang="hr-HR" smtClean="0"/>
-              <a:t>15.1.2025.</a:t>
+              <a:t>16.1.2025.</a:t>
             </a:fld>
             <a:endParaRPr lang="hr-HR"/>
           </a:p>
@@ -705,7 +705,7 @@
           <a:p>
             <a:fld id="{6A232798-267A-4A65-B728-860D168520E9}" type="datetime1">
               <a:rPr lang="hr-HR" smtClean="0"/>
-              <a:t>15.1.2025.</a:t>
+              <a:t>16.1.2025.</a:t>
             </a:fld>
             <a:endParaRPr lang="hr-HR"/>
           </a:p>
@@ -913,7 +913,7 @@
           <a:p>
             <a:fld id="{EA757ED3-79A9-4245-8F0F-F984ABC9CDC0}" type="datetime1">
               <a:rPr lang="hr-HR" smtClean="0"/>
-              <a:t>15.1.2025.</a:t>
+              <a:t>16.1.2025.</a:t>
             </a:fld>
             <a:endParaRPr lang="hr-HR"/>
           </a:p>
@@ -1169,7 +1169,7 @@
           <a:p>
             <a:fld id="{8C531ACD-5387-45BD-B548-1DCDFB961638}" type="datetime1">
               <a:rPr lang="hr-HR" smtClean="0"/>
-              <a:t>15.1.2025.</a:t>
+              <a:t>16.1.2025.</a:t>
             </a:fld>
             <a:endParaRPr lang="hr-HR"/>
           </a:p>
@@ -1339,7 +1339,7 @@
           <a:p>
             <a:fld id="{F119952B-35CB-45F4-B445-93E96AE6AA9A}" type="datetime1">
               <a:rPr lang="hr-HR" smtClean="0"/>
-              <a:t>15.1.2025.</a:t>
+              <a:t>16.1.2025.</a:t>
             </a:fld>
             <a:endParaRPr lang="hr-HR"/>
           </a:p>
@@ -1682,7 +1682,7 @@
           <a:p>
             <a:fld id="{95196C6A-72C5-452A-B645-74DCDF4F800D}" type="datetime1">
               <a:rPr lang="hr-HR" smtClean="0"/>
-              <a:t>15.1.2025.</a:t>
+              <a:t>16.1.2025.</a:t>
             </a:fld>
             <a:endParaRPr lang="hr-HR"/>
           </a:p>
@@ -1957,7 +1957,7 @@
           <a:p>
             <a:fld id="{1C206E91-FFF8-4AB3-8240-55376CB7D14E}" type="datetime1">
               <a:rPr lang="hr-HR" smtClean="0"/>
-              <a:t>15.1.2025.</a:t>
+              <a:t>16.1.2025.</a:t>
             </a:fld>
             <a:endParaRPr lang="hr-HR"/>
           </a:p>
@@ -2336,7 +2336,7 @@
           <a:p>
             <a:fld id="{292B5B90-9CB0-4409-89A2-DA39566333B9}" type="datetime1">
               <a:rPr lang="hr-HR" smtClean="0"/>
-              <a:t>15.1.2025.</a:t>
+              <a:t>16.1.2025.</a:t>
             </a:fld>
             <a:endParaRPr lang="hr-HR"/>
           </a:p>
@@ -2454,7 +2454,7 @@
           <a:p>
             <a:fld id="{3C00C004-70F7-4C97-9947-702C175B2047}" type="datetime1">
               <a:rPr lang="hr-HR" smtClean="0"/>
-              <a:t>15.1.2025.</a:t>
+              <a:t>16.1.2025.</a:t>
             </a:fld>
             <a:endParaRPr lang="hr-HR"/>
           </a:p>
@@ -2625,7 +2625,7 @@
           <a:p>
             <a:fld id="{35847105-24BD-4206-BE09-6051D8DF5A30}" type="datetime1">
               <a:rPr lang="hr-HR" smtClean="0"/>
-              <a:t>15.1.2025.</a:t>
+              <a:t>16.1.2025.</a:t>
             </a:fld>
             <a:endParaRPr lang="hr-HR"/>
           </a:p>
@@ -2979,7 +2979,7 @@
           <a:p>
             <a:fld id="{6EA9D767-858F-4EC9-ADD3-529928E56913}" type="datetime1">
               <a:rPr lang="hr-HR" smtClean="0"/>
-              <a:t>15.1.2025.</a:t>
+              <a:t>16.1.2025.</a:t>
             </a:fld>
             <a:endParaRPr lang="hr-HR"/>
           </a:p>
@@ -3356,7 +3356,7 @@
           <a:p>
             <a:fld id="{117151D8-37D8-4141-AE5C-976E3A606B5B}" type="datetime1">
               <a:rPr lang="hr-HR" smtClean="0"/>
-              <a:t>15.1.2025.</a:t>
+              <a:t>16.1.2025.</a:t>
             </a:fld>
             <a:endParaRPr lang="hr-HR"/>
           </a:p>
@@ -3643,7 +3643,7 @@
           <a:p>
             <a:fld id="{870FF488-27A0-4035-9B9A-B8D9554714E0}" type="datetime1">
               <a:rPr lang="hr-HR" smtClean="0"/>
-              <a:t>15.1.2025.</a:t>
+              <a:t>16.1.2025.</a:t>
             </a:fld>
             <a:endParaRPr lang="hr-HR"/>
           </a:p>
@@ -5089,14 +5089,14 @@
           <p:nvPr>
             <p:extLst>
               <p:ext uri="{D42A27DB-BD31-4B8C-83A1-F6EECF244321}">
-                <p14:modId xmlns:p14="http://schemas.microsoft.com/office/powerpoint/2010/main" val="2328702315"/>
+                <p14:modId xmlns:p14="http://schemas.microsoft.com/office/powerpoint/2010/main" val="1515804292"/>
               </p:ext>
             </p:extLst>
           </p:nvPr>
         </p:nvGraphicFramePr>
         <p:xfrm>
-          <a:off x="1023984" y="2201551"/>
-          <a:ext cx="10131696" cy="3768489"/>
+          <a:off x="1060632" y="1737360"/>
+          <a:ext cx="10070736" cy="4573704"/>
         </p:xfrm>
         <a:graphic>
           <a:graphicData uri="http://schemas.openxmlformats.org/drawingml/2006/table">
@@ -5105,42 +5105,42 @@
                 <a:tableStyleId>{5C22544A-7EE6-4342-B048-85BDC9FD1C3A}</a:tableStyleId>
               </a:tblPr>
               <a:tblGrid>
-                <a:gridCol w="1688616">
+                <a:gridCol w="1678456">
                   <a:extLst>
                     <a:ext uri="{9D8B030D-6E8A-4147-A177-3AD203B41FA5}">
                       <a16:colId xmlns:a16="http://schemas.microsoft.com/office/drawing/2014/main" val="1991548073"/>
                     </a:ext>
                   </a:extLst>
                 </a:gridCol>
-                <a:gridCol w="1688616">
+                <a:gridCol w="1678456">
                   <a:extLst>
                     <a:ext uri="{9D8B030D-6E8A-4147-A177-3AD203B41FA5}">
                       <a16:colId xmlns:a16="http://schemas.microsoft.com/office/drawing/2014/main" val="3575401396"/>
                     </a:ext>
                   </a:extLst>
                 </a:gridCol>
-                <a:gridCol w="1688616">
+                <a:gridCol w="1678456">
                   <a:extLst>
                     <a:ext uri="{9D8B030D-6E8A-4147-A177-3AD203B41FA5}">
                       <a16:colId xmlns:a16="http://schemas.microsoft.com/office/drawing/2014/main" val="2013928293"/>
                     </a:ext>
                   </a:extLst>
                 </a:gridCol>
-                <a:gridCol w="1688616">
+                <a:gridCol w="1678456">
                   <a:extLst>
                     <a:ext uri="{9D8B030D-6E8A-4147-A177-3AD203B41FA5}">
                       <a16:colId xmlns:a16="http://schemas.microsoft.com/office/drawing/2014/main" val="682525828"/>
                     </a:ext>
                   </a:extLst>
                 </a:gridCol>
-                <a:gridCol w="1688616">
+                <a:gridCol w="1678456">
                   <a:extLst>
                     <a:ext uri="{9D8B030D-6E8A-4147-A177-3AD203B41FA5}">
                       <a16:colId xmlns:a16="http://schemas.microsoft.com/office/drawing/2014/main" val="2417135976"/>
                     </a:ext>
                   </a:extLst>
                 </a:gridCol>
-                <a:gridCol w="1688616">
+                <a:gridCol w="1678456">
                   <a:extLst>
                     <a:ext uri="{9D8B030D-6E8A-4147-A177-3AD203B41FA5}">
                       <a16:colId xmlns:a16="http://schemas.microsoft.com/office/drawing/2014/main" val="1842548248"/>
@@ -5148,7 +5148,7 @@
                   </a:extLst>
                 </a:gridCol>
               </a:tblGrid>
-              <a:tr h="1001807">
+              <a:tr h="1169814">
                 <a:tc>
                   <a:txBody>
                     <a:bodyPr/>
@@ -5266,7 +5266,7 @@
                   </a:ext>
                 </a:extLst>
               </a:tr>
-              <a:tr h="859923">
+              <a:tr h="846246">
                 <a:tc>
                   <a:txBody>
                     <a:bodyPr/>
@@ -5363,7 +5363,7 @@
                   </a:ext>
                 </a:extLst>
               </a:tr>
-              <a:tr h="859923">
+              <a:tr h="846246">
                 <a:tc>
                   <a:txBody>
                     <a:bodyPr/>
@@ -5460,7 +5460,100 @@
                   </a:ext>
                 </a:extLst>
               </a:tr>
-              <a:tr h="859923">
+              <a:tr h="846246">
+                <a:tc>
+                  <a:txBody>
+                    <a:bodyPr/>
+                    <a:lstStyle/>
+                    <a:p>
+                      <a:pPr algn="ctr"/>
+                      <a:r>
+                        <a:rPr lang="en-US" sz="2400" dirty="0"/>
+                        <a:t>1:1</a:t>
+                      </a:r>
+                      <a:endParaRPr lang="hr-HR" sz="2400" dirty="0"/>
+                    </a:p>
+                  </a:txBody>
+                  <a:tcPr anchor="ctr"/>
+                </a:tc>
+                <a:tc>
+                  <a:txBody>
+                    <a:bodyPr/>
+                    <a:lstStyle/>
+                    <a:p>
+                      <a:pPr algn="ctr"/>
+                      <a:r>
+                        <a:rPr lang="en-US" sz="2400" dirty="0"/>
+                        <a:t>1</a:t>
+                      </a:r>
+                      <a:endParaRPr lang="hr-HR" sz="2400" dirty="0"/>
+                    </a:p>
+                  </a:txBody>
+                  <a:tcPr anchor="ctr"/>
+                </a:tc>
+                <a:tc>
+                  <a:txBody>
+                    <a:bodyPr/>
+                    <a:lstStyle/>
+                    <a:p>
+                      <a:pPr algn="ctr"/>
+                      <a:r>
+                        <a:rPr lang="hr-HR" sz="2400" dirty="0"/>
+                        <a:t>8.35</a:t>
+                      </a:r>
+                    </a:p>
+                  </a:txBody>
+                  <a:tcPr anchor="ctr"/>
+                </a:tc>
+                <a:tc>
+                  <a:txBody>
+                    <a:bodyPr/>
+                    <a:lstStyle/>
+                    <a:p>
+                      <a:pPr algn="ctr"/>
+                      <a:r>
+                        <a:rPr lang="hr-HR" sz="2400" b="1" dirty="0"/>
+                        <a:t>70.90</a:t>
+                      </a:r>
+                    </a:p>
+                  </a:txBody>
+                  <a:tcPr anchor="ctr"/>
+                </a:tc>
+                <a:tc>
+                  <a:txBody>
+                    <a:bodyPr/>
+                    <a:lstStyle/>
+                    <a:p>
+                      <a:pPr algn="ctr"/>
+                      <a:r>
+                        <a:rPr lang="hr-HR" sz="2400" dirty="0"/>
+                        <a:t> 96.36</a:t>
+                      </a:r>
+                    </a:p>
+                  </a:txBody>
+                  <a:tcPr anchor="ctr"/>
+                </a:tc>
+                <a:tc>
+                  <a:txBody>
+                    <a:bodyPr/>
+                    <a:lstStyle/>
+                    <a:p>
+                      <a:pPr algn="ctr"/>
+                      <a:r>
+                        <a:rPr lang="hr-HR" sz="2400" dirty="0"/>
+                        <a:t>56.08</a:t>
+                      </a:r>
+                    </a:p>
+                  </a:txBody>
+                  <a:tcPr anchor="ctr"/>
+                </a:tc>
+                <a:extLst>
+                  <a:ext uri="{0D108BD9-81ED-4DB2-BD59-A6C34878D82A}">
+                    <a16:rowId xmlns:a16="http://schemas.microsoft.com/office/drawing/2014/main" val="3904148820"/>
+                  </a:ext>
+                </a:extLst>
+              </a:tr>
+              <a:tr h="846246">
                 <a:tc>
                   <a:txBody>
                     <a:bodyPr/>
@@ -5513,10 +5606,10 @@
                     <a:p>
                       <a:pPr algn="ctr"/>
                       <a:r>
-                        <a:rPr lang="en-US" sz="2400" b="1" dirty="0"/>
+                        <a:rPr lang="en-US" sz="2400" b="0" dirty="0"/>
                         <a:t>69.14</a:t>
                       </a:r>
-                      <a:endParaRPr lang="hr-HR" sz="2400" b="1" dirty="0"/>
+                      <a:endParaRPr lang="hr-HR" sz="2400" b="0" dirty="0"/>
                     </a:p>
                   </a:txBody>
                   <a:tcPr anchor="ctr"/>
@@ -5599,10 +5692,10 @@
       </p:grpSpPr>
       <p:pic>
         <p:nvPicPr>
-          <p:cNvPr id="13" name="Picture 12" descr="A graph with a line&#10;&#10;Description automatically generated">
+          <p:cNvPr id="5" name="Picture 4" descr="A graph of a number of individuals&#10;&#10;Description automatically generated with medium confidence">
             <a:extLst>
               <a:ext uri="{FF2B5EF4-FFF2-40B4-BE49-F238E27FC236}">
-                <a16:creationId xmlns:a16="http://schemas.microsoft.com/office/drawing/2014/main" id="{2B39C099-4F1F-F357-8BA4-DB26821947FD}"/>
+                <a16:creationId xmlns:a16="http://schemas.microsoft.com/office/drawing/2014/main" id="{B7A53295-789B-14CB-66F6-D3316D28B3DB}"/>
               </a:ext>
             </a:extLst>
           </p:cNvPr>
@@ -5661,7 +5754,7 @@
           <a:p>
             <a:r>
               <a:rPr lang="en-US" dirty="0"/>
-              <a:t>Threshold validation, 1:10 ratio, 1 epoch</a:t>
+              <a:t>Threshold validation, 1:1 ratio, 1 epoch</a:t>
             </a:r>
             <a:endParaRPr lang="hr-HR" dirty="0"/>
           </a:p>
@@ -5792,26 +5885,29 @@
             <a:pPr lvl="1"/>
             <a:r>
               <a:rPr lang="en-US" sz="2400" dirty="0"/>
-              <a:t>F1 score for fine-tuned </a:t>
-            </a:r>
-            <a:r>
-              <a:rPr lang="en-US" sz="2400"/>
-              <a:t>model (1:10 ratio, 1 epoch):</a:t>
-            </a:r>
-            <a:endParaRPr lang="en-US" sz="2400" dirty="0"/>
+              <a:t>F1 score for fine-tuned model (1:1 ratio, 1 epoch):</a:t>
+            </a:r>
           </a:p>
           <a:p>
             <a:pPr lvl="2"/>
             <a:r>
               <a:rPr lang="en-US" sz="2400" dirty="0"/>
-              <a:t>Train: 88.38%</a:t>
+              <a:t>Train: 92.55%</a:t>
             </a:r>
           </a:p>
           <a:p>
             <a:pPr lvl="2"/>
             <a:r>
               <a:rPr lang="en-US" sz="2400" b="1" dirty="0"/>
-              <a:t>Exhaustive: 69.14%</a:t>
+              <a:t>Exhaustive: </a:t>
+            </a:r>
+            <a:r>
+              <a:rPr lang="hr-HR" sz="2400" b="1" dirty="0"/>
+              <a:t>70.90</a:t>
+            </a:r>
+            <a:r>
+              <a:rPr lang="en-US" sz="2400" b="1" dirty="0"/>
+              <a:t>%</a:t>
             </a:r>
           </a:p>
           <a:p>
